--- a/docs/plots/carbo/jx_carbo_adjcif_anemia2.pptx
+++ b/docs/plots/carbo/jx_carbo_adjcif_anemia2.pptx
@@ -2271,7 +2271,7 @@
           </p:nvSpPr>
           <p:spPr>
             <a:xfrm>
-              <a:off x="910695" y="5262960"/>
+              <a:off x="910695" y="5249745"/>
               <a:ext cx="7706515" cy="0"/>
             </a:xfrm>
             <a:custGeom>
@@ -2314,7 +2314,7 @@
           </p:nvSpPr>
           <p:spPr>
             <a:xfrm>
-              <a:off x="910695" y="4628035"/>
+              <a:off x="910695" y="4588391"/>
               <a:ext cx="7706515" cy="0"/>
             </a:xfrm>
             <a:custGeom>
@@ -2357,7 +2357,7 @@
           </p:nvSpPr>
           <p:spPr>
             <a:xfrm>
-              <a:off x="910695" y="3993111"/>
+              <a:off x="910695" y="3927038"/>
               <a:ext cx="7706515" cy="0"/>
             </a:xfrm>
             <a:custGeom>
@@ -2400,7 +2400,7 @@
           </p:nvSpPr>
           <p:spPr>
             <a:xfrm>
-              <a:off x="910695" y="3358187"/>
+              <a:off x="910695" y="3265684"/>
               <a:ext cx="7706515" cy="0"/>
             </a:xfrm>
             <a:custGeom>
@@ -2443,7 +2443,7 @@
           </p:nvSpPr>
           <p:spPr>
             <a:xfrm>
-              <a:off x="910695" y="2723262"/>
+              <a:off x="910695" y="2604331"/>
               <a:ext cx="7706515" cy="0"/>
             </a:xfrm>
             <a:custGeom>
@@ -2701,7 +2701,7 @@
           </p:nvSpPr>
           <p:spPr>
             <a:xfrm>
-              <a:off x="910695" y="4945497"/>
+              <a:off x="910695" y="4919068"/>
               <a:ext cx="7706515" cy="0"/>
             </a:xfrm>
             <a:custGeom>
@@ -2744,7 +2744,7 @@
           </p:nvSpPr>
           <p:spPr>
             <a:xfrm>
-              <a:off x="910695" y="4310573"/>
+              <a:off x="910695" y="4257715"/>
               <a:ext cx="7706515" cy="0"/>
             </a:xfrm>
             <a:custGeom>
@@ -2787,7 +2787,7 @@
           </p:nvSpPr>
           <p:spPr>
             <a:xfrm>
-              <a:off x="910695" y="3675649"/>
+              <a:off x="910695" y="3596361"/>
               <a:ext cx="7706515" cy="0"/>
             </a:xfrm>
             <a:custGeom>
@@ -2830,7 +2830,7 @@
           </p:nvSpPr>
           <p:spPr>
             <a:xfrm>
-              <a:off x="910695" y="3040724"/>
+              <a:off x="910695" y="2935008"/>
               <a:ext cx="7706515" cy="0"/>
             </a:xfrm>
             <a:custGeom>
@@ -3045,168 +3045,168 @@
           </p:nvSpPr>
           <p:spPr>
             <a:xfrm>
-              <a:off x="1260991" y="3673884"/>
-              <a:ext cx="7005923" cy="1867010"/>
+              <a:off x="1260991" y="3516930"/>
+              <a:ext cx="7005923" cy="2020103"/>
             </a:xfrm>
             <a:custGeom>
               <a:avLst/>
               <a:pathLst>
-                <a:path w="7005923" h="1867010">
+                <a:path w="7005923" h="2020103">
                   <a:moveTo>
-                    <a:pt x="0" y="1867010"/>
+                    <a:pt x="0" y="2020103"/>
                   </a:moveTo>
                   <a:lnTo>
-                    <a:pt x="166807" y="1867010"/>
-                  </a:lnTo>
-                  <a:lnTo>
-                    <a:pt x="166807" y="1827090"/>
-                  </a:lnTo>
-                  <a:lnTo>
-                    <a:pt x="250211" y="1827090"/>
-                  </a:lnTo>
-                  <a:lnTo>
-                    <a:pt x="250211" y="1748747"/>
-                  </a:lnTo>
-                  <a:lnTo>
-                    <a:pt x="417019" y="1748747"/>
-                  </a:lnTo>
-                  <a:lnTo>
-                    <a:pt x="417019" y="1706306"/>
-                  </a:lnTo>
-                  <a:lnTo>
-                    <a:pt x="583826" y="1706306"/>
-                  </a:lnTo>
-                  <a:lnTo>
-                    <a:pt x="583826" y="1542663"/>
-                  </a:lnTo>
-                  <a:lnTo>
-                    <a:pt x="667230" y="1542663"/>
-                  </a:lnTo>
-                  <a:lnTo>
-                    <a:pt x="667230" y="1495021"/>
-                  </a:lnTo>
-                  <a:lnTo>
-                    <a:pt x="750634" y="1495021"/>
-                  </a:lnTo>
-                  <a:lnTo>
-                    <a:pt x="750634" y="1398705"/>
-                  </a:lnTo>
-                  <a:lnTo>
-                    <a:pt x="1084250" y="1398705"/>
-                  </a:lnTo>
-                  <a:lnTo>
-                    <a:pt x="1084250" y="1349461"/>
-                  </a:lnTo>
-                  <a:lnTo>
-                    <a:pt x="1167653" y="1349461"/>
-                  </a:lnTo>
-                  <a:lnTo>
-                    <a:pt x="1167653" y="1301282"/>
-                  </a:lnTo>
-                  <a:lnTo>
-                    <a:pt x="1417865" y="1301282"/>
-                  </a:lnTo>
-                  <a:lnTo>
-                    <a:pt x="1417865" y="1207376"/>
-                  </a:lnTo>
-                  <a:lnTo>
-                    <a:pt x="1501269" y="1207376"/>
-                  </a:lnTo>
-                  <a:lnTo>
-                    <a:pt x="1501269" y="1159036"/>
-                  </a:lnTo>
-                  <a:lnTo>
-                    <a:pt x="2001692" y="1159036"/>
-                  </a:lnTo>
-                  <a:lnTo>
-                    <a:pt x="2001692" y="1108472"/>
-                  </a:lnTo>
-                  <a:lnTo>
-                    <a:pt x="2168500" y="1108472"/>
-                  </a:lnTo>
-                  <a:lnTo>
-                    <a:pt x="2168500" y="1058063"/>
-                  </a:lnTo>
-                  <a:lnTo>
-                    <a:pt x="2585519" y="1058063"/>
-                  </a:lnTo>
-                  <a:lnTo>
-                    <a:pt x="2585519" y="1008654"/>
-                  </a:lnTo>
-                  <a:lnTo>
-                    <a:pt x="3085942" y="1008654"/>
-                  </a:lnTo>
-                  <a:lnTo>
-                    <a:pt x="3085942" y="911931"/>
-                  </a:lnTo>
-                  <a:lnTo>
-                    <a:pt x="3169346" y="911931"/>
-                  </a:lnTo>
-                  <a:lnTo>
-                    <a:pt x="3169346" y="726221"/>
-                  </a:lnTo>
-                  <a:lnTo>
-                    <a:pt x="3336154" y="726221"/>
-                  </a:lnTo>
-                  <a:lnTo>
-                    <a:pt x="3336154" y="678138"/>
-                  </a:lnTo>
-                  <a:lnTo>
-                    <a:pt x="3419557" y="678138"/>
-                  </a:lnTo>
-                  <a:lnTo>
-                    <a:pt x="3419557" y="630741"/>
-                  </a:lnTo>
-                  <a:lnTo>
-                    <a:pt x="4253596" y="630741"/>
-                  </a:lnTo>
-                  <a:lnTo>
-                    <a:pt x="4253596" y="583767"/>
-                  </a:lnTo>
-                  <a:lnTo>
-                    <a:pt x="4587211" y="583767"/>
-                  </a:lnTo>
-                  <a:lnTo>
-                    <a:pt x="4587211" y="537647"/>
-                  </a:lnTo>
-                  <a:lnTo>
-                    <a:pt x="4670615" y="537647"/>
-                  </a:lnTo>
-                  <a:lnTo>
-                    <a:pt x="4670615" y="492268"/>
-                  </a:lnTo>
-                  <a:lnTo>
-                    <a:pt x="4920827" y="492268"/>
-                  </a:lnTo>
-                  <a:lnTo>
-                    <a:pt x="4920827" y="318755"/>
-                  </a:lnTo>
-                  <a:lnTo>
-                    <a:pt x="5004231" y="318755"/>
-                  </a:lnTo>
-                  <a:lnTo>
-                    <a:pt x="5004231" y="272983"/>
-                  </a:lnTo>
-                  <a:lnTo>
-                    <a:pt x="5671461" y="272983"/>
-                  </a:lnTo>
-                  <a:lnTo>
-                    <a:pt x="5671461" y="227891"/>
-                  </a:lnTo>
-                  <a:lnTo>
-                    <a:pt x="6338692" y="227891"/>
-                  </a:lnTo>
-                  <a:lnTo>
-                    <a:pt x="6338692" y="182565"/>
-                  </a:lnTo>
-                  <a:lnTo>
-                    <a:pt x="6672308" y="182565"/>
-                  </a:lnTo>
-                  <a:lnTo>
-                    <a:pt x="6672308" y="45151"/>
-                  </a:lnTo>
-                  <a:lnTo>
-                    <a:pt x="7005923" y="45151"/>
+                    <a:pt x="166807" y="2020103"/>
+                  </a:lnTo>
+                  <a:lnTo>
+                    <a:pt x="166807" y="1976263"/>
+                  </a:lnTo>
+                  <a:lnTo>
+                    <a:pt x="250211" y="1976263"/>
+                  </a:lnTo>
+                  <a:lnTo>
+                    <a:pt x="250211" y="1890449"/>
+                  </a:lnTo>
+                  <a:lnTo>
+                    <a:pt x="417019" y="1890449"/>
+                  </a:lnTo>
+                  <a:lnTo>
+                    <a:pt x="417019" y="1845050"/>
+                  </a:lnTo>
+                  <a:lnTo>
+                    <a:pt x="583826" y="1845050"/>
+                  </a:lnTo>
+                  <a:lnTo>
+                    <a:pt x="583826" y="1669900"/>
+                  </a:lnTo>
+                  <a:lnTo>
+                    <a:pt x="667230" y="1669900"/>
+                  </a:lnTo>
+                  <a:lnTo>
+                    <a:pt x="667230" y="1617258"/>
+                  </a:lnTo>
+                  <a:lnTo>
+                    <a:pt x="750634" y="1617258"/>
+                  </a:lnTo>
+                  <a:lnTo>
+                    <a:pt x="750634" y="1511090"/>
+                  </a:lnTo>
+                  <a:lnTo>
+                    <a:pt x="1084250" y="1511090"/>
+                  </a:lnTo>
+                  <a:lnTo>
+                    <a:pt x="1084250" y="1455791"/>
+                  </a:lnTo>
+                  <a:lnTo>
+                    <a:pt x="1167653" y="1455791"/>
+                  </a:lnTo>
+                  <a:lnTo>
+                    <a:pt x="1167653" y="1401907"/>
+                  </a:lnTo>
+                  <a:lnTo>
+                    <a:pt x="1417865" y="1401907"/>
+                  </a:lnTo>
+                  <a:lnTo>
+                    <a:pt x="1417865" y="1297565"/>
+                  </a:lnTo>
+                  <a:lnTo>
+                    <a:pt x="1501269" y="1297565"/>
+                  </a:lnTo>
+                  <a:lnTo>
+                    <a:pt x="1501269" y="1244285"/>
+                  </a:lnTo>
+                  <a:lnTo>
+                    <a:pt x="2001692" y="1244285"/>
+                  </a:lnTo>
+                  <a:lnTo>
+                    <a:pt x="2001692" y="1188487"/>
+                  </a:lnTo>
+                  <a:lnTo>
+                    <a:pt x="2168500" y="1188487"/>
+                  </a:lnTo>
+                  <a:lnTo>
+                    <a:pt x="2168500" y="1132974"/>
+                  </a:lnTo>
+                  <a:lnTo>
+                    <a:pt x="2585519" y="1132974"/>
+                  </a:lnTo>
+                  <a:lnTo>
+                    <a:pt x="2585519" y="1078691"/>
+                  </a:lnTo>
+                  <a:lnTo>
+                    <a:pt x="3085942" y="1078691"/>
+                  </a:lnTo>
+                  <a:lnTo>
+                    <a:pt x="3085942" y="972838"/>
+                  </a:lnTo>
+                  <a:lnTo>
+                    <a:pt x="3169346" y="972838"/>
+                  </a:lnTo>
+                  <a:lnTo>
+                    <a:pt x="3169346" y="770044"/>
+                  </a:lnTo>
+                  <a:lnTo>
+                    <a:pt x="3336154" y="770044"/>
+                  </a:lnTo>
+                  <a:lnTo>
+                    <a:pt x="3336154" y="718228"/>
+                  </a:lnTo>
+                  <a:lnTo>
+                    <a:pt x="3419557" y="718228"/>
+                  </a:lnTo>
+                  <a:lnTo>
+                    <a:pt x="3419557" y="667229"/>
+                  </a:lnTo>
+                  <a:lnTo>
+                    <a:pt x="4253596" y="667229"/>
+                  </a:lnTo>
+                  <a:lnTo>
+                    <a:pt x="4253596" y="616935"/>
+                  </a:lnTo>
+                  <a:lnTo>
+                    <a:pt x="4587211" y="616935"/>
+                  </a:lnTo>
+                  <a:lnTo>
+                    <a:pt x="4587211" y="567597"/>
+                  </a:lnTo>
+                  <a:lnTo>
+                    <a:pt x="4670615" y="567597"/>
+                  </a:lnTo>
+                  <a:lnTo>
+                    <a:pt x="4670615" y="519118"/>
+                  </a:lnTo>
+                  <a:lnTo>
+                    <a:pt x="4920827" y="519118"/>
+                  </a:lnTo>
+                  <a:lnTo>
+                    <a:pt x="4920827" y="334206"/>
+                  </a:lnTo>
+                  <a:lnTo>
+                    <a:pt x="5004231" y="334206"/>
+                  </a:lnTo>
+                  <a:lnTo>
+                    <a:pt x="5004231" y="285673"/>
+                  </a:lnTo>
+                  <a:lnTo>
+                    <a:pt x="5671461" y="285673"/>
+                  </a:lnTo>
+                  <a:lnTo>
+                    <a:pt x="5671461" y="237974"/>
+                  </a:lnTo>
+                  <a:lnTo>
+                    <a:pt x="6338692" y="237974"/>
+                  </a:lnTo>
+                  <a:lnTo>
+                    <a:pt x="6338692" y="190173"/>
+                  </a:lnTo>
+                  <a:lnTo>
+                    <a:pt x="6672308" y="190173"/>
+                  </a:lnTo>
+                  <a:lnTo>
+                    <a:pt x="6672308" y="46892"/>
+                  </a:lnTo>
+                  <a:lnTo>
+                    <a:pt x="7005923" y="46892"/>
                   </a:lnTo>
                   <a:lnTo>
                     <a:pt x="7005923" y="0"/>
@@ -3239,167 +3239,167 @@
           <p:spPr>
             <a:xfrm>
               <a:off x="1260991" y="2861938"/>
-              <a:ext cx="7005923" cy="2648220"/>
+              <a:ext cx="7005923" cy="2649894"/>
             </a:xfrm>
             <a:custGeom>
               <a:avLst/>
               <a:pathLst>
-                <a:path w="7005923" h="2648220">
+                <a:path w="7005923" h="2649894">
                   <a:moveTo>
-                    <a:pt x="0" y="2648220"/>
+                    <a:pt x="0" y="2649894"/>
                   </a:moveTo>
                   <a:lnTo>
-                    <a:pt x="166807" y="2648220"/>
-                  </a:lnTo>
-                  <a:lnTo>
-                    <a:pt x="166807" y="2578340"/>
-                  </a:lnTo>
-                  <a:lnTo>
-                    <a:pt x="250211" y="2578340"/>
-                  </a:lnTo>
-                  <a:lnTo>
-                    <a:pt x="250211" y="2444165"/>
-                  </a:lnTo>
-                  <a:lnTo>
-                    <a:pt x="417019" y="2444165"/>
-                  </a:lnTo>
-                  <a:lnTo>
-                    <a:pt x="417019" y="2373007"/>
-                  </a:lnTo>
-                  <a:lnTo>
-                    <a:pt x="583826" y="2373007"/>
-                  </a:lnTo>
-                  <a:lnTo>
-                    <a:pt x="583826" y="2107538"/>
-                  </a:lnTo>
-                  <a:lnTo>
-                    <a:pt x="667230" y="2107538"/>
-                  </a:lnTo>
-                  <a:lnTo>
-                    <a:pt x="667230" y="2032630"/>
-                  </a:lnTo>
-                  <a:lnTo>
-                    <a:pt x="750634" y="2032630"/>
-                  </a:lnTo>
-                  <a:lnTo>
-                    <a:pt x="750634" y="1884063"/>
-                  </a:lnTo>
-                  <a:lnTo>
-                    <a:pt x="1084250" y="1884063"/>
-                  </a:lnTo>
-                  <a:lnTo>
-                    <a:pt x="1084250" y="1809472"/>
-                  </a:lnTo>
-                  <a:lnTo>
-                    <a:pt x="1167653" y="1809472"/>
-                  </a:lnTo>
-                  <a:lnTo>
-                    <a:pt x="1167653" y="1737323"/>
-                  </a:lnTo>
-                  <a:lnTo>
-                    <a:pt x="1417865" y="1737323"/>
-                  </a:lnTo>
-                  <a:lnTo>
-                    <a:pt x="1417865" y="1598881"/>
-                  </a:lnTo>
-                  <a:lnTo>
-                    <a:pt x="1501269" y="1598881"/>
-                  </a:lnTo>
-                  <a:lnTo>
-                    <a:pt x="1501269" y="1528662"/>
-                  </a:lnTo>
-                  <a:lnTo>
-                    <a:pt x="2001692" y="1528662"/>
-                  </a:lnTo>
-                  <a:lnTo>
-                    <a:pt x="2001692" y="1455925"/>
-                  </a:lnTo>
-                  <a:lnTo>
-                    <a:pt x="2168500" y="1455925"/>
-                  </a:lnTo>
-                  <a:lnTo>
-                    <a:pt x="2168500" y="1384096"/>
-                  </a:lnTo>
-                  <a:lnTo>
-                    <a:pt x="2585519" y="1384096"/>
-                  </a:lnTo>
-                  <a:lnTo>
-                    <a:pt x="2585519" y="1314330"/>
-                  </a:lnTo>
-                  <a:lnTo>
-                    <a:pt x="3085942" y="1314330"/>
-                  </a:lnTo>
-                  <a:lnTo>
-                    <a:pt x="3085942" y="1179472"/>
-                  </a:lnTo>
-                  <a:lnTo>
-                    <a:pt x="3169346" y="1179472"/>
-                  </a:lnTo>
-                  <a:lnTo>
-                    <a:pt x="3169346" y="926401"/>
-                  </a:lnTo>
-                  <a:lnTo>
-                    <a:pt x="3336154" y="926401"/>
-                  </a:lnTo>
-                  <a:lnTo>
-                    <a:pt x="3336154" y="862046"/>
-                  </a:lnTo>
-                  <a:lnTo>
-                    <a:pt x="3419557" y="862046"/>
-                  </a:lnTo>
-                  <a:lnTo>
-                    <a:pt x="3419557" y="799055"/>
-                  </a:lnTo>
-                  <a:lnTo>
-                    <a:pt x="4253596" y="799055"/>
-                  </a:lnTo>
-                  <a:lnTo>
-                    <a:pt x="4253596" y="737055"/>
-                  </a:lnTo>
-                  <a:lnTo>
-                    <a:pt x="4587211" y="737055"/>
-                  </a:lnTo>
-                  <a:lnTo>
-                    <a:pt x="4587211" y="676590"/>
-                  </a:lnTo>
-                  <a:lnTo>
-                    <a:pt x="4670615" y="676590"/>
-                  </a:lnTo>
-                  <a:lnTo>
-                    <a:pt x="4670615" y="617484"/>
-                  </a:lnTo>
-                  <a:lnTo>
-                    <a:pt x="4920827" y="617484"/>
-                  </a:lnTo>
-                  <a:lnTo>
-                    <a:pt x="4920827" y="394946"/>
-                  </a:lnTo>
-                  <a:lnTo>
-                    <a:pt x="5004231" y="394946"/>
-                  </a:lnTo>
-                  <a:lnTo>
-                    <a:pt x="5004231" y="337139"/>
-                  </a:lnTo>
-                  <a:lnTo>
-                    <a:pt x="5671461" y="337139"/>
-                  </a:lnTo>
-                  <a:lnTo>
-                    <a:pt x="5671461" y="280554"/>
-                  </a:lnTo>
-                  <a:lnTo>
-                    <a:pt x="6338692" y="280554"/>
-                  </a:lnTo>
-                  <a:lnTo>
-                    <a:pt x="6338692" y="224033"/>
-                  </a:lnTo>
-                  <a:lnTo>
-                    <a:pt x="6672308" y="224033"/>
-                  </a:lnTo>
-                  <a:lnTo>
-                    <a:pt x="6672308" y="54868"/>
-                  </a:lnTo>
-                  <a:lnTo>
-                    <a:pt x="7005923" y="54868"/>
+                    <a:pt x="166807" y="2649894"/>
+                  </a:lnTo>
+                  <a:lnTo>
+                    <a:pt x="166807" y="2581498"/>
+                  </a:lnTo>
+                  <a:lnTo>
+                    <a:pt x="250211" y="2581498"/>
+                  </a:lnTo>
+                  <a:lnTo>
+                    <a:pt x="250211" y="2450069"/>
+                  </a:lnTo>
+                  <a:lnTo>
+                    <a:pt x="417019" y="2450069"/>
+                  </a:lnTo>
+                  <a:lnTo>
+                    <a:pt x="417019" y="2381755"/>
+                  </a:lnTo>
+                  <a:lnTo>
+                    <a:pt x="583826" y="2381755"/>
+                  </a:lnTo>
+                  <a:lnTo>
+                    <a:pt x="583826" y="2125111"/>
+                  </a:lnTo>
+                  <a:lnTo>
+                    <a:pt x="667230" y="2125111"/>
+                  </a:lnTo>
+                  <a:lnTo>
+                    <a:pt x="667230" y="2049889"/>
+                  </a:lnTo>
+                  <a:lnTo>
+                    <a:pt x="750634" y="2049889"/>
+                  </a:lnTo>
+                  <a:lnTo>
+                    <a:pt x="750634" y="1900531"/>
+                  </a:lnTo>
+                  <a:lnTo>
+                    <a:pt x="1084250" y="1900531"/>
+                  </a:lnTo>
+                  <a:lnTo>
+                    <a:pt x="1084250" y="1823885"/>
+                  </a:lnTo>
+                  <a:lnTo>
+                    <a:pt x="1167653" y="1823885"/>
+                  </a:lnTo>
+                  <a:lnTo>
+                    <a:pt x="1167653" y="1749900"/>
+                  </a:lnTo>
+                  <a:lnTo>
+                    <a:pt x="1417865" y="1749900"/>
+                  </a:lnTo>
+                  <a:lnTo>
+                    <a:pt x="1417865" y="1608474"/>
+                  </a:lnTo>
+                  <a:lnTo>
+                    <a:pt x="1501269" y="1608474"/>
+                  </a:lnTo>
+                  <a:lnTo>
+                    <a:pt x="1501269" y="1537134"/>
+                  </a:lnTo>
+                  <a:lnTo>
+                    <a:pt x="2001692" y="1537134"/>
+                  </a:lnTo>
+                  <a:lnTo>
+                    <a:pt x="2001692" y="1463024"/>
+                  </a:lnTo>
+                  <a:lnTo>
+                    <a:pt x="2168500" y="1463024"/>
+                  </a:lnTo>
+                  <a:lnTo>
+                    <a:pt x="2168500" y="1389877"/>
+                  </a:lnTo>
+                  <a:lnTo>
+                    <a:pt x="2585519" y="1389877"/>
+                  </a:lnTo>
+                  <a:lnTo>
+                    <a:pt x="2585519" y="1318892"/>
+                  </a:lnTo>
+                  <a:lnTo>
+                    <a:pt x="3085942" y="1318892"/>
+                  </a:lnTo>
+                  <a:lnTo>
+                    <a:pt x="3085942" y="1181947"/>
+                  </a:lnTo>
+                  <a:lnTo>
+                    <a:pt x="3169346" y="1181947"/>
+                  </a:lnTo>
+                  <a:lnTo>
+                    <a:pt x="3169346" y="924672"/>
+                  </a:lnTo>
+                  <a:lnTo>
+                    <a:pt x="3336154" y="924672"/>
+                  </a:lnTo>
+                  <a:lnTo>
+                    <a:pt x="3336154" y="859946"/>
+                  </a:lnTo>
+                  <a:lnTo>
+                    <a:pt x="3419557" y="859946"/>
+                  </a:lnTo>
+                  <a:lnTo>
+                    <a:pt x="3419557" y="796622"/>
+                  </a:lnTo>
+                  <a:lnTo>
+                    <a:pt x="4253596" y="796622"/>
+                  </a:lnTo>
+                  <a:lnTo>
+                    <a:pt x="4253596" y="734538"/>
+                  </a:lnTo>
+                  <a:lnTo>
+                    <a:pt x="4587211" y="734538"/>
+                  </a:lnTo>
+                  <a:lnTo>
+                    <a:pt x="4587211" y="673978"/>
+                  </a:lnTo>
+                  <a:lnTo>
+                    <a:pt x="4670615" y="673978"/>
+                  </a:lnTo>
+                  <a:lnTo>
+                    <a:pt x="4670615" y="614799"/>
+                  </a:lnTo>
+                  <a:lnTo>
+                    <a:pt x="4920827" y="614799"/>
+                  </a:lnTo>
+                  <a:lnTo>
+                    <a:pt x="4920827" y="391936"/>
+                  </a:lnTo>
+                  <a:lnTo>
+                    <a:pt x="5004231" y="391936"/>
+                  </a:lnTo>
+                  <a:lnTo>
+                    <a:pt x="5004231" y="334171"/>
+                  </a:lnTo>
+                  <a:lnTo>
+                    <a:pt x="5671461" y="334171"/>
+                  </a:lnTo>
+                  <a:lnTo>
+                    <a:pt x="5671461" y="277685"/>
+                  </a:lnTo>
+                  <a:lnTo>
+                    <a:pt x="6338692" y="277685"/>
+                  </a:lnTo>
+                  <a:lnTo>
+                    <a:pt x="6338692" y="221361"/>
+                  </a:lnTo>
+                  <a:lnTo>
+                    <a:pt x="6672308" y="221361"/>
+                  </a:lnTo>
+                  <a:lnTo>
+                    <a:pt x="6672308" y="54184"/>
+                  </a:lnTo>
+                  <a:lnTo>
+                    <a:pt x="7005923" y="54184"/>
                   </a:lnTo>
                   <a:lnTo>
                     <a:pt x="7005923" y="0"/>
@@ -3477,7 +3477,7 @@
           </p:nvSpPr>
           <p:spPr>
             <a:xfrm>
-              <a:off x="692708" y="4905447"/>
+              <a:off x="692708" y="4879018"/>
               <a:ext cx="155356" cy="80101"/>
             </a:xfrm>
             <a:prstGeom prst="rect">
@@ -3523,7 +3523,7 @@
           </p:nvSpPr>
           <p:spPr>
             <a:xfrm>
-              <a:off x="692708" y="4270522"/>
+              <a:off x="692708" y="4217664"/>
               <a:ext cx="155356" cy="80101"/>
             </a:xfrm>
             <a:prstGeom prst="rect">
@@ -3569,7 +3569,7 @@
           </p:nvSpPr>
           <p:spPr>
             <a:xfrm>
-              <a:off x="692708" y="3635598"/>
+              <a:off x="692708" y="3556311"/>
               <a:ext cx="155356" cy="80101"/>
             </a:xfrm>
             <a:prstGeom prst="rect">
@@ -3615,7 +3615,7 @@
           </p:nvSpPr>
           <p:spPr>
             <a:xfrm>
-              <a:off x="692708" y="3000674"/>
+              <a:off x="692708" y="2894957"/>
               <a:ext cx="155356" cy="80101"/>
             </a:xfrm>
             <a:prstGeom prst="rect">
@@ -4142,7 +4142,7 @@
                   <a:latin typeface="Helvetica"/>
                   <a:cs typeface="Helvetica"/>
                 </a:rPr>
-                <a:t>Discrep &gt;= +25 vs &lt;+25: subHR = 1.79 (95% CI 0.86-3.74), p = 0.121</a:t>
+                <a:t>Discrep &gt;= +25 vs &lt;+25: subHR = 1.59 (95% CI 0.77-3.27), p = 0.206</a:t>
               </a:r>
             </a:p>
           </p:txBody>

--- a/docs/plots/carbo/jx_carbo_adjcif_anemia2.pptx
+++ b/docs/plots/carbo/jx_carbo_adjcif_anemia2.pptx
@@ -2271,7 +2271,7 @@
           </p:nvSpPr>
           <p:spPr>
             <a:xfrm>
-              <a:off x="910695" y="5249745"/>
+              <a:off x="910695" y="5253504"/>
               <a:ext cx="7706515" cy="0"/>
             </a:xfrm>
             <a:custGeom>
@@ -2314,7 +2314,7 @@
           </p:nvSpPr>
           <p:spPr>
             <a:xfrm>
-              <a:off x="910695" y="4588391"/>
+              <a:off x="910695" y="4599667"/>
               <a:ext cx="7706515" cy="0"/>
             </a:xfrm>
             <a:custGeom>
@@ -2357,7 +2357,7 @@
           </p:nvSpPr>
           <p:spPr>
             <a:xfrm>
-              <a:off x="910695" y="3927038"/>
+              <a:off x="910695" y="3945831"/>
               <a:ext cx="7706515" cy="0"/>
             </a:xfrm>
             <a:custGeom>
@@ -2400,7 +2400,7 @@
           </p:nvSpPr>
           <p:spPr>
             <a:xfrm>
-              <a:off x="910695" y="3265684"/>
+              <a:off x="910695" y="3291995"/>
               <a:ext cx="7706515" cy="0"/>
             </a:xfrm>
             <a:custGeom>
@@ -2443,7 +2443,7 @@
           </p:nvSpPr>
           <p:spPr>
             <a:xfrm>
-              <a:off x="910695" y="2604331"/>
+              <a:off x="910695" y="2638158"/>
               <a:ext cx="7706515" cy="0"/>
             </a:xfrm>
             <a:custGeom>
@@ -2701,7 +2701,7 @@
           </p:nvSpPr>
           <p:spPr>
             <a:xfrm>
-              <a:off x="910695" y="4919068"/>
+              <a:off x="910695" y="4926585"/>
               <a:ext cx="7706515" cy="0"/>
             </a:xfrm>
             <a:custGeom>
@@ -2744,7 +2744,7 @@
           </p:nvSpPr>
           <p:spPr>
             <a:xfrm>
-              <a:off x="910695" y="4257715"/>
+              <a:off x="910695" y="4272749"/>
               <a:ext cx="7706515" cy="0"/>
             </a:xfrm>
             <a:custGeom>
@@ -2787,7 +2787,7 @@
           </p:nvSpPr>
           <p:spPr>
             <a:xfrm>
-              <a:off x="910695" y="3596361"/>
+              <a:off x="910695" y="3618913"/>
               <a:ext cx="7706515" cy="0"/>
             </a:xfrm>
             <a:custGeom>
@@ -2830,7 +2830,7 @@
           </p:nvSpPr>
           <p:spPr>
             <a:xfrm>
-              <a:off x="910695" y="2935008"/>
+              <a:off x="910695" y="2965076"/>
               <a:ext cx="7706515" cy="0"/>
             </a:xfrm>
             <a:custGeom>
@@ -3045,168 +3045,168 @@
           </p:nvSpPr>
           <p:spPr>
             <a:xfrm>
-              <a:off x="1260991" y="3516930"/>
-              <a:ext cx="7005923" cy="2020103"/>
+              <a:off x="1260991" y="3571099"/>
+              <a:ext cx="7005923" cy="1967078"/>
             </a:xfrm>
             <a:custGeom>
               <a:avLst/>
               <a:pathLst>
-                <a:path w="7005923" h="2020103">
+                <a:path w="7005923" h="1967078">
                   <a:moveTo>
-                    <a:pt x="0" y="2020103"/>
+                    <a:pt x="0" y="1967078"/>
                   </a:moveTo>
                   <a:lnTo>
-                    <a:pt x="166807" y="2020103"/>
-                  </a:lnTo>
-                  <a:lnTo>
-                    <a:pt x="166807" y="1976263"/>
-                  </a:lnTo>
-                  <a:lnTo>
-                    <a:pt x="250211" y="1976263"/>
-                  </a:lnTo>
-                  <a:lnTo>
-                    <a:pt x="250211" y="1890449"/>
-                  </a:lnTo>
-                  <a:lnTo>
-                    <a:pt x="417019" y="1890449"/>
-                  </a:lnTo>
-                  <a:lnTo>
-                    <a:pt x="417019" y="1845050"/>
-                  </a:lnTo>
-                  <a:lnTo>
-                    <a:pt x="583826" y="1845050"/>
-                  </a:lnTo>
-                  <a:lnTo>
-                    <a:pt x="583826" y="1669900"/>
-                  </a:lnTo>
-                  <a:lnTo>
-                    <a:pt x="667230" y="1669900"/>
-                  </a:lnTo>
-                  <a:lnTo>
-                    <a:pt x="667230" y="1617258"/>
-                  </a:lnTo>
-                  <a:lnTo>
-                    <a:pt x="750634" y="1617258"/>
-                  </a:lnTo>
-                  <a:lnTo>
-                    <a:pt x="750634" y="1511090"/>
-                  </a:lnTo>
-                  <a:lnTo>
-                    <a:pt x="1084250" y="1511090"/>
-                  </a:lnTo>
-                  <a:lnTo>
-                    <a:pt x="1084250" y="1455791"/>
-                  </a:lnTo>
-                  <a:lnTo>
-                    <a:pt x="1167653" y="1455791"/>
-                  </a:lnTo>
-                  <a:lnTo>
-                    <a:pt x="1167653" y="1401907"/>
-                  </a:lnTo>
-                  <a:lnTo>
-                    <a:pt x="1417865" y="1401907"/>
-                  </a:lnTo>
-                  <a:lnTo>
-                    <a:pt x="1417865" y="1297565"/>
-                  </a:lnTo>
-                  <a:lnTo>
-                    <a:pt x="1501269" y="1297565"/>
-                  </a:lnTo>
-                  <a:lnTo>
-                    <a:pt x="1501269" y="1244285"/>
-                  </a:lnTo>
-                  <a:lnTo>
-                    <a:pt x="2001692" y="1244285"/>
-                  </a:lnTo>
-                  <a:lnTo>
-                    <a:pt x="2001692" y="1188487"/>
-                  </a:lnTo>
-                  <a:lnTo>
-                    <a:pt x="2168500" y="1188487"/>
-                  </a:lnTo>
-                  <a:lnTo>
-                    <a:pt x="2168500" y="1132974"/>
-                  </a:lnTo>
-                  <a:lnTo>
-                    <a:pt x="2585519" y="1132974"/>
-                  </a:lnTo>
-                  <a:lnTo>
-                    <a:pt x="2585519" y="1078691"/>
-                  </a:lnTo>
-                  <a:lnTo>
-                    <a:pt x="3085942" y="1078691"/>
-                  </a:lnTo>
-                  <a:lnTo>
-                    <a:pt x="3085942" y="972838"/>
-                  </a:lnTo>
-                  <a:lnTo>
-                    <a:pt x="3169346" y="972838"/>
-                  </a:lnTo>
-                  <a:lnTo>
-                    <a:pt x="3169346" y="770044"/>
-                  </a:lnTo>
-                  <a:lnTo>
-                    <a:pt x="3336154" y="770044"/>
-                  </a:lnTo>
-                  <a:lnTo>
-                    <a:pt x="3336154" y="718228"/>
-                  </a:lnTo>
-                  <a:lnTo>
-                    <a:pt x="3419557" y="718228"/>
-                  </a:lnTo>
-                  <a:lnTo>
-                    <a:pt x="3419557" y="667229"/>
-                  </a:lnTo>
-                  <a:lnTo>
-                    <a:pt x="4253596" y="667229"/>
-                  </a:lnTo>
-                  <a:lnTo>
-                    <a:pt x="4253596" y="616935"/>
-                  </a:lnTo>
-                  <a:lnTo>
-                    <a:pt x="4587211" y="616935"/>
-                  </a:lnTo>
-                  <a:lnTo>
-                    <a:pt x="4587211" y="567597"/>
-                  </a:lnTo>
-                  <a:lnTo>
-                    <a:pt x="4670615" y="567597"/>
-                  </a:lnTo>
-                  <a:lnTo>
-                    <a:pt x="4670615" y="519118"/>
-                  </a:lnTo>
-                  <a:lnTo>
-                    <a:pt x="4920827" y="519118"/>
-                  </a:lnTo>
-                  <a:lnTo>
-                    <a:pt x="4920827" y="334206"/>
-                  </a:lnTo>
-                  <a:lnTo>
-                    <a:pt x="5004231" y="334206"/>
-                  </a:lnTo>
-                  <a:lnTo>
-                    <a:pt x="5004231" y="285673"/>
-                  </a:lnTo>
-                  <a:lnTo>
-                    <a:pt x="5671461" y="285673"/>
-                  </a:lnTo>
-                  <a:lnTo>
-                    <a:pt x="5671461" y="237974"/>
-                  </a:lnTo>
-                  <a:lnTo>
-                    <a:pt x="6338692" y="237974"/>
-                  </a:lnTo>
-                  <a:lnTo>
-                    <a:pt x="6338692" y="190173"/>
-                  </a:lnTo>
-                  <a:lnTo>
-                    <a:pt x="6672308" y="190173"/>
-                  </a:lnTo>
-                  <a:lnTo>
-                    <a:pt x="6672308" y="46892"/>
-                  </a:lnTo>
-                  <a:lnTo>
-                    <a:pt x="7005923" y="46892"/>
+                    <a:pt x="166807" y="1967078"/>
+                  </a:lnTo>
+                  <a:lnTo>
+                    <a:pt x="166807" y="1924382"/>
+                  </a:lnTo>
+                  <a:lnTo>
+                    <a:pt x="250211" y="1924382"/>
+                  </a:lnTo>
+                  <a:lnTo>
+                    <a:pt x="250211" y="1840893"/>
+                  </a:lnTo>
+                  <a:lnTo>
+                    <a:pt x="417019" y="1840893"/>
+                  </a:lnTo>
+                  <a:lnTo>
+                    <a:pt x="417019" y="1796975"/>
+                  </a:lnTo>
+                  <a:lnTo>
+                    <a:pt x="583826" y="1796975"/>
+                  </a:lnTo>
+                  <a:lnTo>
+                    <a:pt x="583826" y="1628222"/>
+                  </a:lnTo>
+                  <a:lnTo>
+                    <a:pt x="667230" y="1628222"/>
+                  </a:lnTo>
+                  <a:lnTo>
+                    <a:pt x="667230" y="1577923"/>
+                  </a:lnTo>
+                  <a:lnTo>
+                    <a:pt x="750634" y="1577923"/>
+                  </a:lnTo>
+                  <a:lnTo>
+                    <a:pt x="750634" y="1476288"/>
+                  </a:lnTo>
+                  <a:lnTo>
+                    <a:pt x="1084250" y="1476288"/>
+                  </a:lnTo>
+                  <a:lnTo>
+                    <a:pt x="1084250" y="1423625"/>
+                  </a:lnTo>
+                  <a:lnTo>
+                    <a:pt x="1167653" y="1423625"/>
+                  </a:lnTo>
+                  <a:lnTo>
+                    <a:pt x="1167653" y="1372253"/>
+                  </a:lnTo>
+                  <a:lnTo>
+                    <a:pt x="1417865" y="1372253"/>
+                  </a:lnTo>
+                  <a:lnTo>
+                    <a:pt x="1417865" y="1272666"/>
+                  </a:lnTo>
+                  <a:lnTo>
+                    <a:pt x="1501269" y="1272666"/>
+                  </a:lnTo>
+                  <a:lnTo>
+                    <a:pt x="1501269" y="1221193"/>
+                  </a:lnTo>
+                  <a:lnTo>
+                    <a:pt x="2001692" y="1221193"/>
+                  </a:lnTo>
+                  <a:lnTo>
+                    <a:pt x="2001692" y="1167085"/>
+                  </a:lnTo>
+                  <a:lnTo>
+                    <a:pt x="2168500" y="1167085"/>
+                  </a:lnTo>
+                  <a:lnTo>
+                    <a:pt x="2168500" y="1113019"/>
+                  </a:lnTo>
+                  <a:lnTo>
+                    <a:pt x="2585519" y="1113019"/>
+                  </a:lnTo>
+                  <a:lnTo>
+                    <a:pt x="2585519" y="1060104"/>
+                  </a:lnTo>
+                  <a:lnTo>
+                    <a:pt x="3085942" y="1060104"/>
+                  </a:lnTo>
+                  <a:lnTo>
+                    <a:pt x="3085942" y="956599"/>
+                  </a:lnTo>
+                  <a:lnTo>
+                    <a:pt x="3169346" y="956599"/>
+                  </a:lnTo>
+                  <a:lnTo>
+                    <a:pt x="3169346" y="757569"/>
+                  </a:lnTo>
+                  <a:lnTo>
+                    <a:pt x="3336154" y="757569"/>
+                  </a:lnTo>
+                  <a:lnTo>
+                    <a:pt x="3336154" y="707081"/>
+                  </a:lnTo>
+                  <a:lnTo>
+                    <a:pt x="3419557" y="707081"/>
+                  </a:lnTo>
+                  <a:lnTo>
+                    <a:pt x="3419557" y="657291"/>
+                  </a:lnTo>
+                  <a:lnTo>
+                    <a:pt x="4253596" y="657291"/>
+                  </a:lnTo>
+                  <a:lnTo>
+                    <a:pt x="4253596" y="608223"/>
+                  </a:lnTo>
+                  <a:lnTo>
+                    <a:pt x="4587211" y="608223"/>
+                  </a:lnTo>
+                  <a:lnTo>
+                    <a:pt x="4587211" y="560089"/>
+                  </a:lnTo>
+                  <a:lnTo>
+                    <a:pt x="4670615" y="560089"/>
+                  </a:lnTo>
+                  <a:lnTo>
+                    <a:pt x="4670615" y="512727"/>
+                  </a:lnTo>
+                  <a:lnTo>
+                    <a:pt x="4920827" y="512727"/>
+                  </a:lnTo>
+                  <a:lnTo>
+                    <a:pt x="4920827" y="332176"/>
+                  </a:lnTo>
+                  <a:lnTo>
+                    <a:pt x="5004231" y="332176"/>
+                  </a:lnTo>
+                  <a:lnTo>
+                    <a:pt x="5004231" y="284422"/>
+                  </a:lnTo>
+                  <a:lnTo>
+                    <a:pt x="5671461" y="284422"/>
+                  </a:lnTo>
+                  <a:lnTo>
+                    <a:pt x="5671461" y="237435"/>
+                  </a:lnTo>
+                  <a:lnTo>
+                    <a:pt x="6338692" y="237435"/>
+                  </a:lnTo>
+                  <a:lnTo>
+                    <a:pt x="6338692" y="190106"/>
+                  </a:lnTo>
+                  <a:lnTo>
+                    <a:pt x="6672308" y="190106"/>
+                  </a:lnTo>
+                  <a:lnTo>
+                    <a:pt x="6672308" y="46983"/>
+                  </a:lnTo>
+                  <a:lnTo>
+                    <a:pt x="7005923" y="46983"/>
                   </a:lnTo>
                   <a:lnTo>
                     <a:pt x="7005923" y="0"/>
@@ -3239,167 +3239,167 @@
           <p:spPr>
             <a:xfrm>
               <a:off x="1260991" y="2861938"/>
-              <a:ext cx="7005923" cy="2649894"/>
+              <a:ext cx="7005923" cy="2648853"/>
             </a:xfrm>
             <a:custGeom>
               <a:avLst/>
               <a:pathLst>
-                <a:path w="7005923" h="2649894">
+                <a:path w="7005923" h="2648853">
                   <a:moveTo>
-                    <a:pt x="0" y="2649894"/>
+                    <a:pt x="0" y="2648853"/>
                   </a:moveTo>
                   <a:lnTo>
-                    <a:pt x="166807" y="2649894"/>
-                  </a:lnTo>
-                  <a:lnTo>
-                    <a:pt x="166807" y="2581498"/>
-                  </a:lnTo>
-                  <a:lnTo>
-                    <a:pt x="250211" y="2581498"/>
-                  </a:lnTo>
-                  <a:lnTo>
-                    <a:pt x="250211" y="2450069"/>
-                  </a:lnTo>
-                  <a:lnTo>
-                    <a:pt x="417019" y="2450069"/>
-                  </a:lnTo>
-                  <a:lnTo>
-                    <a:pt x="417019" y="2381755"/>
-                  </a:lnTo>
-                  <a:lnTo>
-                    <a:pt x="583826" y="2381755"/>
-                  </a:lnTo>
-                  <a:lnTo>
-                    <a:pt x="583826" y="2125111"/>
-                  </a:lnTo>
-                  <a:lnTo>
-                    <a:pt x="667230" y="2125111"/>
-                  </a:lnTo>
-                  <a:lnTo>
-                    <a:pt x="667230" y="2049889"/>
-                  </a:lnTo>
-                  <a:lnTo>
-                    <a:pt x="750634" y="2049889"/>
-                  </a:lnTo>
-                  <a:lnTo>
-                    <a:pt x="750634" y="1900531"/>
-                  </a:lnTo>
-                  <a:lnTo>
-                    <a:pt x="1084250" y="1900531"/>
-                  </a:lnTo>
-                  <a:lnTo>
-                    <a:pt x="1084250" y="1823885"/>
-                  </a:lnTo>
-                  <a:lnTo>
-                    <a:pt x="1167653" y="1823885"/>
-                  </a:lnTo>
-                  <a:lnTo>
-                    <a:pt x="1167653" y="1749900"/>
-                  </a:lnTo>
-                  <a:lnTo>
-                    <a:pt x="1417865" y="1749900"/>
-                  </a:lnTo>
-                  <a:lnTo>
-                    <a:pt x="1417865" y="1608474"/>
-                  </a:lnTo>
-                  <a:lnTo>
-                    <a:pt x="1501269" y="1608474"/>
-                  </a:lnTo>
-                  <a:lnTo>
-                    <a:pt x="1501269" y="1537134"/>
-                  </a:lnTo>
-                  <a:lnTo>
-                    <a:pt x="2001692" y="1537134"/>
-                  </a:lnTo>
-                  <a:lnTo>
-                    <a:pt x="2001692" y="1463024"/>
-                  </a:lnTo>
-                  <a:lnTo>
-                    <a:pt x="2168500" y="1463024"/>
-                  </a:lnTo>
-                  <a:lnTo>
-                    <a:pt x="2168500" y="1389877"/>
-                  </a:lnTo>
-                  <a:lnTo>
-                    <a:pt x="2585519" y="1389877"/>
-                  </a:lnTo>
-                  <a:lnTo>
-                    <a:pt x="2585519" y="1318892"/>
-                  </a:lnTo>
-                  <a:lnTo>
-                    <a:pt x="3085942" y="1318892"/>
-                  </a:lnTo>
-                  <a:lnTo>
-                    <a:pt x="3085942" y="1181947"/>
-                  </a:lnTo>
-                  <a:lnTo>
-                    <a:pt x="3169346" y="1181947"/>
-                  </a:lnTo>
-                  <a:lnTo>
-                    <a:pt x="3169346" y="924672"/>
-                  </a:lnTo>
-                  <a:lnTo>
-                    <a:pt x="3336154" y="924672"/>
-                  </a:lnTo>
-                  <a:lnTo>
-                    <a:pt x="3336154" y="859946"/>
-                  </a:lnTo>
-                  <a:lnTo>
-                    <a:pt x="3419557" y="859946"/>
-                  </a:lnTo>
-                  <a:lnTo>
-                    <a:pt x="3419557" y="796622"/>
-                  </a:lnTo>
-                  <a:lnTo>
-                    <a:pt x="4253596" y="796622"/>
-                  </a:lnTo>
-                  <a:lnTo>
-                    <a:pt x="4253596" y="734538"/>
-                  </a:lnTo>
-                  <a:lnTo>
-                    <a:pt x="4587211" y="734538"/>
-                  </a:lnTo>
-                  <a:lnTo>
-                    <a:pt x="4587211" y="673978"/>
-                  </a:lnTo>
-                  <a:lnTo>
-                    <a:pt x="4670615" y="673978"/>
-                  </a:lnTo>
-                  <a:lnTo>
-                    <a:pt x="4670615" y="614799"/>
-                  </a:lnTo>
-                  <a:lnTo>
-                    <a:pt x="4920827" y="614799"/>
-                  </a:lnTo>
-                  <a:lnTo>
-                    <a:pt x="4920827" y="391936"/>
-                  </a:lnTo>
-                  <a:lnTo>
-                    <a:pt x="5004231" y="391936"/>
-                  </a:lnTo>
-                  <a:lnTo>
-                    <a:pt x="5004231" y="334171"/>
-                  </a:lnTo>
-                  <a:lnTo>
-                    <a:pt x="5671461" y="334171"/>
-                  </a:lnTo>
-                  <a:lnTo>
-                    <a:pt x="5671461" y="277685"/>
-                  </a:lnTo>
-                  <a:lnTo>
-                    <a:pt x="6338692" y="277685"/>
-                  </a:lnTo>
-                  <a:lnTo>
-                    <a:pt x="6338692" y="221361"/>
-                  </a:lnTo>
-                  <a:lnTo>
-                    <a:pt x="6672308" y="221361"/>
-                  </a:lnTo>
-                  <a:lnTo>
-                    <a:pt x="6672308" y="54184"/>
-                  </a:lnTo>
-                  <a:lnTo>
-                    <a:pt x="7005923" y="54184"/>
+                    <a:pt x="166807" y="2648853"/>
+                  </a:lnTo>
+                  <a:lnTo>
+                    <a:pt x="166807" y="2579472"/>
+                  </a:lnTo>
+                  <a:lnTo>
+                    <a:pt x="250211" y="2579472"/>
+                  </a:lnTo>
+                  <a:lnTo>
+                    <a:pt x="250211" y="2446481"/>
+                  </a:lnTo>
+                  <a:lnTo>
+                    <a:pt x="417019" y="2446481"/>
+                  </a:lnTo>
+                  <a:lnTo>
+                    <a:pt x="417019" y="2377838"/>
+                  </a:lnTo>
+                  <a:lnTo>
+                    <a:pt x="583826" y="2377838"/>
+                  </a:lnTo>
+                  <a:lnTo>
+                    <a:pt x="583826" y="2121454"/>
+                  </a:lnTo>
+                  <a:lnTo>
+                    <a:pt x="667230" y="2121454"/>
+                  </a:lnTo>
+                  <a:lnTo>
+                    <a:pt x="667230" y="2047052"/>
+                  </a:lnTo>
+                  <a:lnTo>
+                    <a:pt x="750634" y="2047052"/>
+                  </a:lnTo>
+                  <a:lnTo>
+                    <a:pt x="750634" y="1899187"/>
+                  </a:lnTo>
+                  <a:lnTo>
+                    <a:pt x="1084250" y="1899187"/>
+                  </a:lnTo>
+                  <a:lnTo>
+                    <a:pt x="1084250" y="1823773"/>
+                  </a:lnTo>
+                  <a:lnTo>
+                    <a:pt x="1167653" y="1823773"/>
+                  </a:lnTo>
+                  <a:lnTo>
+                    <a:pt x="1167653" y="1750940"/>
+                  </a:lnTo>
+                  <a:lnTo>
+                    <a:pt x="1417865" y="1750940"/>
+                  </a:lnTo>
+                  <a:lnTo>
+                    <a:pt x="1417865" y="1611684"/>
+                  </a:lnTo>
+                  <a:lnTo>
+                    <a:pt x="1501269" y="1611684"/>
+                  </a:lnTo>
+                  <a:lnTo>
+                    <a:pt x="1501269" y="1540648"/>
+                  </a:lnTo>
+                  <a:lnTo>
+                    <a:pt x="2001692" y="1540648"/>
+                  </a:lnTo>
+                  <a:lnTo>
+                    <a:pt x="2001692" y="1466628"/>
+                  </a:lnTo>
+                  <a:lnTo>
+                    <a:pt x="2168500" y="1466628"/>
+                  </a:lnTo>
+                  <a:lnTo>
+                    <a:pt x="2168500" y="1393309"/>
+                  </a:lnTo>
+                  <a:lnTo>
+                    <a:pt x="2585519" y="1393309"/>
+                  </a:lnTo>
+                  <a:lnTo>
+                    <a:pt x="2585519" y="1322149"/>
+                  </a:lnTo>
+                  <a:lnTo>
+                    <a:pt x="3085942" y="1322149"/>
+                  </a:lnTo>
+                  <a:lnTo>
+                    <a:pt x="3085942" y="1184598"/>
+                  </a:lnTo>
+                  <a:lnTo>
+                    <a:pt x="3169346" y="1184598"/>
+                  </a:lnTo>
+                  <a:lnTo>
+                    <a:pt x="3169346" y="925817"/>
+                  </a:lnTo>
+                  <a:lnTo>
+                    <a:pt x="3336154" y="925817"/>
+                  </a:lnTo>
+                  <a:lnTo>
+                    <a:pt x="3336154" y="861301"/>
+                  </a:lnTo>
+                  <a:lnTo>
+                    <a:pt x="3419557" y="861301"/>
+                  </a:lnTo>
+                  <a:lnTo>
+                    <a:pt x="3419557" y="798105"/>
+                  </a:lnTo>
+                  <a:lnTo>
+                    <a:pt x="4253596" y="798105"/>
+                  </a:lnTo>
+                  <a:lnTo>
+                    <a:pt x="4253596" y="736232"/>
+                  </a:lnTo>
+                  <a:lnTo>
+                    <a:pt x="4587211" y="736232"/>
+                  </a:lnTo>
+                  <a:lnTo>
+                    <a:pt x="4587211" y="675921"/>
+                  </a:lnTo>
+                  <a:lnTo>
+                    <a:pt x="4670615" y="675921"/>
+                  </a:lnTo>
+                  <a:lnTo>
+                    <a:pt x="4670615" y="616943"/>
+                  </a:lnTo>
+                  <a:lnTo>
+                    <a:pt x="4920827" y="616943"/>
+                  </a:lnTo>
+                  <a:lnTo>
+                    <a:pt x="4920827" y="395313"/>
+                  </a:lnTo>
+                  <a:lnTo>
+                    <a:pt x="5004231" y="395313"/>
+                  </a:lnTo>
+                  <a:lnTo>
+                    <a:pt x="5004231" y="337516"/>
+                  </a:lnTo>
+                  <a:lnTo>
+                    <a:pt x="5671461" y="337516"/>
+                  </a:lnTo>
+                  <a:lnTo>
+                    <a:pt x="5671461" y="280972"/>
+                  </a:lnTo>
+                  <a:lnTo>
+                    <a:pt x="6338692" y="280972"/>
+                  </a:lnTo>
+                  <a:lnTo>
+                    <a:pt x="6338692" y="224336"/>
+                  </a:lnTo>
+                  <a:lnTo>
+                    <a:pt x="6672308" y="224336"/>
+                  </a:lnTo>
+                  <a:lnTo>
+                    <a:pt x="6672308" y="54981"/>
+                  </a:lnTo>
+                  <a:lnTo>
+                    <a:pt x="7005923" y="54981"/>
                   </a:lnTo>
                   <a:lnTo>
                     <a:pt x="7005923" y="0"/>
@@ -3477,7 +3477,7 @@
           </p:nvSpPr>
           <p:spPr>
             <a:xfrm>
-              <a:off x="692708" y="4879018"/>
+              <a:off x="692708" y="4886535"/>
               <a:ext cx="155356" cy="80101"/>
             </a:xfrm>
             <a:prstGeom prst="rect">
@@ -3523,7 +3523,7 @@
           </p:nvSpPr>
           <p:spPr>
             <a:xfrm>
-              <a:off x="692708" y="4217664"/>
+              <a:off x="692708" y="4232698"/>
               <a:ext cx="155356" cy="80101"/>
             </a:xfrm>
             <a:prstGeom prst="rect">
@@ -3569,7 +3569,7 @@
           </p:nvSpPr>
           <p:spPr>
             <a:xfrm>
-              <a:off x="692708" y="3556311"/>
+              <a:off x="692708" y="3578862"/>
               <a:ext cx="155356" cy="80101"/>
             </a:xfrm>
             <a:prstGeom prst="rect">
@@ -3615,7 +3615,7 @@
           </p:nvSpPr>
           <p:spPr>
             <a:xfrm>
-              <a:off x="692708" y="2894957"/>
+              <a:off x="692708" y="2925026"/>
               <a:ext cx="155356" cy="80101"/>
             </a:xfrm>
             <a:prstGeom prst="rect">
@@ -4142,7 +4142,7 @@
                   <a:latin typeface="Helvetica"/>
                   <a:cs typeface="Helvetica"/>
                 </a:rPr>
-                <a:t>Discrep &gt;= +25 vs &lt;+25: subHR = 1.59 (95% CI 0.77-3.27), p = 0.206</a:t>
+                <a:t>Discrep &gt;= +25 vs &lt;+25: subHR = 1.66 (95% CI 0.81-3.39), p = 0.164</a:t>
               </a:r>
             </a:p>
           </p:txBody>

--- a/docs/plots/carbo/jx_carbo_adjcif_anemia2.pptx
+++ b/docs/plots/carbo/jx_carbo_adjcif_anemia2.pptx
@@ -2271,7 +2271,7 @@
           </p:nvSpPr>
           <p:spPr>
             <a:xfrm>
-              <a:off x="910695" y="5253504"/>
+              <a:off x="910695" y="5249745"/>
               <a:ext cx="7706515" cy="0"/>
             </a:xfrm>
             <a:custGeom>
@@ -2314,7 +2314,7 @@
           </p:nvSpPr>
           <p:spPr>
             <a:xfrm>
-              <a:off x="910695" y="4599667"/>
+              <a:off x="910695" y="4588391"/>
               <a:ext cx="7706515" cy="0"/>
             </a:xfrm>
             <a:custGeom>
@@ -2357,7 +2357,7 @@
           </p:nvSpPr>
           <p:spPr>
             <a:xfrm>
-              <a:off x="910695" y="3945831"/>
+              <a:off x="910695" y="3927038"/>
               <a:ext cx="7706515" cy="0"/>
             </a:xfrm>
             <a:custGeom>
@@ -2400,7 +2400,7 @@
           </p:nvSpPr>
           <p:spPr>
             <a:xfrm>
-              <a:off x="910695" y="3291995"/>
+              <a:off x="910695" y="3265684"/>
               <a:ext cx="7706515" cy="0"/>
             </a:xfrm>
             <a:custGeom>
@@ -2443,7 +2443,7 @@
           </p:nvSpPr>
           <p:spPr>
             <a:xfrm>
-              <a:off x="910695" y="2638158"/>
+              <a:off x="910695" y="2604331"/>
               <a:ext cx="7706515" cy="0"/>
             </a:xfrm>
             <a:custGeom>
@@ -2701,7 +2701,7 @@
           </p:nvSpPr>
           <p:spPr>
             <a:xfrm>
-              <a:off x="910695" y="4926585"/>
+              <a:off x="910695" y="4919068"/>
               <a:ext cx="7706515" cy="0"/>
             </a:xfrm>
             <a:custGeom>
@@ -2744,7 +2744,7 @@
           </p:nvSpPr>
           <p:spPr>
             <a:xfrm>
-              <a:off x="910695" y="4272749"/>
+              <a:off x="910695" y="4257715"/>
               <a:ext cx="7706515" cy="0"/>
             </a:xfrm>
             <a:custGeom>
@@ -2787,7 +2787,7 @@
           </p:nvSpPr>
           <p:spPr>
             <a:xfrm>
-              <a:off x="910695" y="3618913"/>
+              <a:off x="910695" y="3596361"/>
               <a:ext cx="7706515" cy="0"/>
             </a:xfrm>
             <a:custGeom>
@@ -2830,7 +2830,7 @@
           </p:nvSpPr>
           <p:spPr>
             <a:xfrm>
-              <a:off x="910695" y="2965076"/>
+              <a:off x="910695" y="2935008"/>
               <a:ext cx="7706515" cy="0"/>
             </a:xfrm>
             <a:custGeom>
@@ -3045,168 +3045,168 @@
           </p:nvSpPr>
           <p:spPr>
             <a:xfrm>
-              <a:off x="1260991" y="3571099"/>
-              <a:ext cx="7005923" cy="1967078"/>
+              <a:off x="1260991" y="3516930"/>
+              <a:ext cx="7005923" cy="2020103"/>
             </a:xfrm>
             <a:custGeom>
               <a:avLst/>
               <a:pathLst>
-                <a:path w="7005923" h="1967078">
+                <a:path w="7005923" h="2020103">
                   <a:moveTo>
-                    <a:pt x="0" y="1967078"/>
+                    <a:pt x="0" y="2020103"/>
                   </a:moveTo>
                   <a:lnTo>
-                    <a:pt x="166807" y="1967078"/>
-                  </a:lnTo>
-                  <a:lnTo>
-                    <a:pt x="166807" y="1924382"/>
-                  </a:lnTo>
-                  <a:lnTo>
-                    <a:pt x="250211" y="1924382"/>
-                  </a:lnTo>
-                  <a:lnTo>
-                    <a:pt x="250211" y="1840893"/>
-                  </a:lnTo>
-                  <a:lnTo>
-                    <a:pt x="417019" y="1840893"/>
-                  </a:lnTo>
-                  <a:lnTo>
-                    <a:pt x="417019" y="1796975"/>
-                  </a:lnTo>
-                  <a:lnTo>
-                    <a:pt x="583826" y="1796975"/>
-                  </a:lnTo>
-                  <a:lnTo>
-                    <a:pt x="583826" y="1628222"/>
-                  </a:lnTo>
-                  <a:lnTo>
-                    <a:pt x="667230" y="1628222"/>
-                  </a:lnTo>
-                  <a:lnTo>
-                    <a:pt x="667230" y="1577923"/>
-                  </a:lnTo>
-                  <a:lnTo>
-                    <a:pt x="750634" y="1577923"/>
-                  </a:lnTo>
-                  <a:lnTo>
-                    <a:pt x="750634" y="1476288"/>
-                  </a:lnTo>
-                  <a:lnTo>
-                    <a:pt x="1084250" y="1476288"/>
-                  </a:lnTo>
-                  <a:lnTo>
-                    <a:pt x="1084250" y="1423625"/>
-                  </a:lnTo>
-                  <a:lnTo>
-                    <a:pt x="1167653" y="1423625"/>
-                  </a:lnTo>
-                  <a:lnTo>
-                    <a:pt x="1167653" y="1372253"/>
-                  </a:lnTo>
-                  <a:lnTo>
-                    <a:pt x="1417865" y="1372253"/>
-                  </a:lnTo>
-                  <a:lnTo>
-                    <a:pt x="1417865" y="1272666"/>
-                  </a:lnTo>
-                  <a:lnTo>
-                    <a:pt x="1501269" y="1272666"/>
-                  </a:lnTo>
-                  <a:lnTo>
-                    <a:pt x="1501269" y="1221193"/>
-                  </a:lnTo>
-                  <a:lnTo>
-                    <a:pt x="2001692" y="1221193"/>
-                  </a:lnTo>
-                  <a:lnTo>
-                    <a:pt x="2001692" y="1167085"/>
-                  </a:lnTo>
-                  <a:lnTo>
-                    <a:pt x="2168500" y="1167085"/>
-                  </a:lnTo>
-                  <a:lnTo>
-                    <a:pt x="2168500" y="1113019"/>
-                  </a:lnTo>
-                  <a:lnTo>
-                    <a:pt x="2585519" y="1113019"/>
-                  </a:lnTo>
-                  <a:lnTo>
-                    <a:pt x="2585519" y="1060104"/>
-                  </a:lnTo>
-                  <a:lnTo>
-                    <a:pt x="3085942" y="1060104"/>
-                  </a:lnTo>
-                  <a:lnTo>
-                    <a:pt x="3085942" y="956599"/>
-                  </a:lnTo>
-                  <a:lnTo>
-                    <a:pt x="3169346" y="956599"/>
-                  </a:lnTo>
-                  <a:lnTo>
-                    <a:pt x="3169346" y="757569"/>
-                  </a:lnTo>
-                  <a:lnTo>
-                    <a:pt x="3336154" y="757569"/>
-                  </a:lnTo>
-                  <a:lnTo>
-                    <a:pt x="3336154" y="707081"/>
-                  </a:lnTo>
-                  <a:lnTo>
-                    <a:pt x="3419557" y="707081"/>
-                  </a:lnTo>
-                  <a:lnTo>
-                    <a:pt x="3419557" y="657291"/>
-                  </a:lnTo>
-                  <a:lnTo>
-                    <a:pt x="4253596" y="657291"/>
-                  </a:lnTo>
-                  <a:lnTo>
-                    <a:pt x="4253596" y="608223"/>
-                  </a:lnTo>
-                  <a:lnTo>
-                    <a:pt x="4587211" y="608223"/>
-                  </a:lnTo>
-                  <a:lnTo>
-                    <a:pt x="4587211" y="560089"/>
-                  </a:lnTo>
-                  <a:lnTo>
-                    <a:pt x="4670615" y="560089"/>
-                  </a:lnTo>
-                  <a:lnTo>
-                    <a:pt x="4670615" y="512727"/>
-                  </a:lnTo>
-                  <a:lnTo>
-                    <a:pt x="4920827" y="512727"/>
-                  </a:lnTo>
-                  <a:lnTo>
-                    <a:pt x="4920827" y="332176"/>
-                  </a:lnTo>
-                  <a:lnTo>
-                    <a:pt x="5004231" y="332176"/>
-                  </a:lnTo>
-                  <a:lnTo>
-                    <a:pt x="5004231" y="284422"/>
-                  </a:lnTo>
-                  <a:lnTo>
-                    <a:pt x="5671461" y="284422"/>
-                  </a:lnTo>
-                  <a:lnTo>
-                    <a:pt x="5671461" y="237435"/>
-                  </a:lnTo>
-                  <a:lnTo>
-                    <a:pt x="6338692" y="237435"/>
-                  </a:lnTo>
-                  <a:lnTo>
-                    <a:pt x="6338692" y="190106"/>
-                  </a:lnTo>
-                  <a:lnTo>
-                    <a:pt x="6672308" y="190106"/>
-                  </a:lnTo>
-                  <a:lnTo>
-                    <a:pt x="6672308" y="46983"/>
-                  </a:lnTo>
-                  <a:lnTo>
-                    <a:pt x="7005923" y="46983"/>
+                    <a:pt x="166807" y="2020103"/>
+                  </a:lnTo>
+                  <a:lnTo>
+                    <a:pt x="166807" y="1976263"/>
+                  </a:lnTo>
+                  <a:lnTo>
+                    <a:pt x="250211" y="1976263"/>
+                  </a:lnTo>
+                  <a:lnTo>
+                    <a:pt x="250211" y="1890449"/>
+                  </a:lnTo>
+                  <a:lnTo>
+                    <a:pt x="417019" y="1890449"/>
+                  </a:lnTo>
+                  <a:lnTo>
+                    <a:pt x="417019" y="1845050"/>
+                  </a:lnTo>
+                  <a:lnTo>
+                    <a:pt x="583826" y="1845050"/>
+                  </a:lnTo>
+                  <a:lnTo>
+                    <a:pt x="583826" y="1669900"/>
+                  </a:lnTo>
+                  <a:lnTo>
+                    <a:pt x="667230" y="1669900"/>
+                  </a:lnTo>
+                  <a:lnTo>
+                    <a:pt x="667230" y="1617258"/>
+                  </a:lnTo>
+                  <a:lnTo>
+                    <a:pt x="750634" y="1617258"/>
+                  </a:lnTo>
+                  <a:lnTo>
+                    <a:pt x="750634" y="1511090"/>
+                  </a:lnTo>
+                  <a:lnTo>
+                    <a:pt x="1084250" y="1511090"/>
+                  </a:lnTo>
+                  <a:lnTo>
+                    <a:pt x="1084250" y="1455791"/>
+                  </a:lnTo>
+                  <a:lnTo>
+                    <a:pt x="1167653" y="1455791"/>
+                  </a:lnTo>
+                  <a:lnTo>
+                    <a:pt x="1167653" y="1401907"/>
+                  </a:lnTo>
+                  <a:lnTo>
+                    <a:pt x="1417865" y="1401907"/>
+                  </a:lnTo>
+                  <a:lnTo>
+                    <a:pt x="1417865" y="1297565"/>
+                  </a:lnTo>
+                  <a:lnTo>
+                    <a:pt x="1501269" y="1297565"/>
+                  </a:lnTo>
+                  <a:lnTo>
+                    <a:pt x="1501269" y="1244285"/>
+                  </a:lnTo>
+                  <a:lnTo>
+                    <a:pt x="2001692" y="1244285"/>
+                  </a:lnTo>
+                  <a:lnTo>
+                    <a:pt x="2001692" y="1188487"/>
+                  </a:lnTo>
+                  <a:lnTo>
+                    <a:pt x="2168500" y="1188487"/>
+                  </a:lnTo>
+                  <a:lnTo>
+                    <a:pt x="2168500" y="1132974"/>
+                  </a:lnTo>
+                  <a:lnTo>
+                    <a:pt x="2585519" y="1132974"/>
+                  </a:lnTo>
+                  <a:lnTo>
+                    <a:pt x="2585519" y="1078691"/>
+                  </a:lnTo>
+                  <a:lnTo>
+                    <a:pt x="3085942" y="1078691"/>
+                  </a:lnTo>
+                  <a:lnTo>
+                    <a:pt x="3085942" y="972838"/>
+                  </a:lnTo>
+                  <a:lnTo>
+                    <a:pt x="3169346" y="972838"/>
+                  </a:lnTo>
+                  <a:lnTo>
+                    <a:pt x="3169346" y="770044"/>
+                  </a:lnTo>
+                  <a:lnTo>
+                    <a:pt x="3336154" y="770044"/>
+                  </a:lnTo>
+                  <a:lnTo>
+                    <a:pt x="3336154" y="718228"/>
+                  </a:lnTo>
+                  <a:lnTo>
+                    <a:pt x="3419557" y="718228"/>
+                  </a:lnTo>
+                  <a:lnTo>
+                    <a:pt x="3419557" y="667229"/>
+                  </a:lnTo>
+                  <a:lnTo>
+                    <a:pt x="4253596" y="667229"/>
+                  </a:lnTo>
+                  <a:lnTo>
+                    <a:pt x="4253596" y="616935"/>
+                  </a:lnTo>
+                  <a:lnTo>
+                    <a:pt x="4587211" y="616935"/>
+                  </a:lnTo>
+                  <a:lnTo>
+                    <a:pt x="4587211" y="567597"/>
+                  </a:lnTo>
+                  <a:lnTo>
+                    <a:pt x="4670615" y="567597"/>
+                  </a:lnTo>
+                  <a:lnTo>
+                    <a:pt x="4670615" y="519118"/>
+                  </a:lnTo>
+                  <a:lnTo>
+                    <a:pt x="4920827" y="519118"/>
+                  </a:lnTo>
+                  <a:lnTo>
+                    <a:pt x="4920827" y="334206"/>
+                  </a:lnTo>
+                  <a:lnTo>
+                    <a:pt x="5004231" y="334206"/>
+                  </a:lnTo>
+                  <a:lnTo>
+                    <a:pt x="5004231" y="285673"/>
+                  </a:lnTo>
+                  <a:lnTo>
+                    <a:pt x="5671461" y="285673"/>
+                  </a:lnTo>
+                  <a:lnTo>
+                    <a:pt x="5671461" y="237974"/>
+                  </a:lnTo>
+                  <a:lnTo>
+                    <a:pt x="6338692" y="237974"/>
+                  </a:lnTo>
+                  <a:lnTo>
+                    <a:pt x="6338692" y="190173"/>
+                  </a:lnTo>
+                  <a:lnTo>
+                    <a:pt x="6672308" y="190173"/>
+                  </a:lnTo>
+                  <a:lnTo>
+                    <a:pt x="6672308" y="46892"/>
+                  </a:lnTo>
+                  <a:lnTo>
+                    <a:pt x="7005923" y="46892"/>
                   </a:lnTo>
                   <a:lnTo>
                     <a:pt x="7005923" y="0"/>
@@ -3239,167 +3239,167 @@
           <p:spPr>
             <a:xfrm>
               <a:off x="1260991" y="2861938"/>
-              <a:ext cx="7005923" cy="2648853"/>
+              <a:ext cx="7005923" cy="2649894"/>
             </a:xfrm>
             <a:custGeom>
               <a:avLst/>
               <a:pathLst>
-                <a:path w="7005923" h="2648853">
+                <a:path w="7005923" h="2649894">
                   <a:moveTo>
-                    <a:pt x="0" y="2648853"/>
+                    <a:pt x="0" y="2649894"/>
                   </a:moveTo>
                   <a:lnTo>
-                    <a:pt x="166807" y="2648853"/>
-                  </a:lnTo>
-                  <a:lnTo>
-                    <a:pt x="166807" y="2579472"/>
-                  </a:lnTo>
-                  <a:lnTo>
-                    <a:pt x="250211" y="2579472"/>
-                  </a:lnTo>
-                  <a:lnTo>
-                    <a:pt x="250211" y="2446481"/>
-                  </a:lnTo>
-                  <a:lnTo>
-                    <a:pt x="417019" y="2446481"/>
-                  </a:lnTo>
-                  <a:lnTo>
-                    <a:pt x="417019" y="2377838"/>
-                  </a:lnTo>
-                  <a:lnTo>
-                    <a:pt x="583826" y="2377838"/>
-                  </a:lnTo>
-                  <a:lnTo>
-                    <a:pt x="583826" y="2121454"/>
-                  </a:lnTo>
-                  <a:lnTo>
-                    <a:pt x="667230" y="2121454"/>
-                  </a:lnTo>
-                  <a:lnTo>
-                    <a:pt x="667230" y="2047052"/>
-                  </a:lnTo>
-                  <a:lnTo>
-                    <a:pt x="750634" y="2047052"/>
-                  </a:lnTo>
-                  <a:lnTo>
-                    <a:pt x="750634" y="1899187"/>
-                  </a:lnTo>
-                  <a:lnTo>
-                    <a:pt x="1084250" y="1899187"/>
-                  </a:lnTo>
-                  <a:lnTo>
-                    <a:pt x="1084250" y="1823773"/>
-                  </a:lnTo>
-                  <a:lnTo>
-                    <a:pt x="1167653" y="1823773"/>
-                  </a:lnTo>
-                  <a:lnTo>
-                    <a:pt x="1167653" y="1750940"/>
-                  </a:lnTo>
-                  <a:lnTo>
-                    <a:pt x="1417865" y="1750940"/>
-                  </a:lnTo>
-                  <a:lnTo>
-                    <a:pt x="1417865" y="1611684"/>
-                  </a:lnTo>
-                  <a:lnTo>
-                    <a:pt x="1501269" y="1611684"/>
-                  </a:lnTo>
-                  <a:lnTo>
-                    <a:pt x="1501269" y="1540648"/>
-                  </a:lnTo>
-                  <a:lnTo>
-                    <a:pt x="2001692" y="1540648"/>
-                  </a:lnTo>
-                  <a:lnTo>
-                    <a:pt x="2001692" y="1466628"/>
-                  </a:lnTo>
-                  <a:lnTo>
-                    <a:pt x="2168500" y="1466628"/>
-                  </a:lnTo>
-                  <a:lnTo>
-                    <a:pt x="2168500" y="1393309"/>
-                  </a:lnTo>
-                  <a:lnTo>
-                    <a:pt x="2585519" y="1393309"/>
-                  </a:lnTo>
-                  <a:lnTo>
-                    <a:pt x="2585519" y="1322149"/>
-                  </a:lnTo>
-                  <a:lnTo>
-                    <a:pt x="3085942" y="1322149"/>
-                  </a:lnTo>
-                  <a:lnTo>
-                    <a:pt x="3085942" y="1184598"/>
-                  </a:lnTo>
-                  <a:lnTo>
-                    <a:pt x="3169346" y="1184598"/>
-                  </a:lnTo>
-                  <a:lnTo>
-                    <a:pt x="3169346" y="925817"/>
-                  </a:lnTo>
-                  <a:lnTo>
-                    <a:pt x="3336154" y="925817"/>
-                  </a:lnTo>
-                  <a:lnTo>
-                    <a:pt x="3336154" y="861301"/>
-                  </a:lnTo>
-                  <a:lnTo>
-                    <a:pt x="3419557" y="861301"/>
-                  </a:lnTo>
-                  <a:lnTo>
-                    <a:pt x="3419557" y="798105"/>
-                  </a:lnTo>
-                  <a:lnTo>
-                    <a:pt x="4253596" y="798105"/>
-                  </a:lnTo>
-                  <a:lnTo>
-                    <a:pt x="4253596" y="736232"/>
-                  </a:lnTo>
-                  <a:lnTo>
-                    <a:pt x="4587211" y="736232"/>
-                  </a:lnTo>
-                  <a:lnTo>
-                    <a:pt x="4587211" y="675921"/>
-                  </a:lnTo>
-                  <a:lnTo>
-                    <a:pt x="4670615" y="675921"/>
-                  </a:lnTo>
-                  <a:lnTo>
-                    <a:pt x="4670615" y="616943"/>
-                  </a:lnTo>
-                  <a:lnTo>
-                    <a:pt x="4920827" y="616943"/>
-                  </a:lnTo>
-                  <a:lnTo>
-                    <a:pt x="4920827" y="395313"/>
-                  </a:lnTo>
-                  <a:lnTo>
-                    <a:pt x="5004231" y="395313"/>
-                  </a:lnTo>
-                  <a:lnTo>
-                    <a:pt x="5004231" y="337516"/>
-                  </a:lnTo>
-                  <a:lnTo>
-                    <a:pt x="5671461" y="337516"/>
-                  </a:lnTo>
-                  <a:lnTo>
-                    <a:pt x="5671461" y="280972"/>
-                  </a:lnTo>
-                  <a:lnTo>
-                    <a:pt x="6338692" y="280972"/>
-                  </a:lnTo>
-                  <a:lnTo>
-                    <a:pt x="6338692" y="224336"/>
-                  </a:lnTo>
-                  <a:lnTo>
-                    <a:pt x="6672308" y="224336"/>
-                  </a:lnTo>
-                  <a:lnTo>
-                    <a:pt x="6672308" y="54981"/>
-                  </a:lnTo>
-                  <a:lnTo>
-                    <a:pt x="7005923" y="54981"/>
+                    <a:pt x="166807" y="2649894"/>
+                  </a:lnTo>
+                  <a:lnTo>
+                    <a:pt x="166807" y="2581498"/>
+                  </a:lnTo>
+                  <a:lnTo>
+                    <a:pt x="250211" y="2581498"/>
+                  </a:lnTo>
+                  <a:lnTo>
+                    <a:pt x="250211" y="2450069"/>
+                  </a:lnTo>
+                  <a:lnTo>
+                    <a:pt x="417019" y="2450069"/>
+                  </a:lnTo>
+                  <a:lnTo>
+                    <a:pt x="417019" y="2381755"/>
+                  </a:lnTo>
+                  <a:lnTo>
+                    <a:pt x="583826" y="2381755"/>
+                  </a:lnTo>
+                  <a:lnTo>
+                    <a:pt x="583826" y="2125111"/>
+                  </a:lnTo>
+                  <a:lnTo>
+                    <a:pt x="667230" y="2125111"/>
+                  </a:lnTo>
+                  <a:lnTo>
+                    <a:pt x="667230" y="2049889"/>
+                  </a:lnTo>
+                  <a:lnTo>
+                    <a:pt x="750634" y="2049889"/>
+                  </a:lnTo>
+                  <a:lnTo>
+                    <a:pt x="750634" y="1900531"/>
+                  </a:lnTo>
+                  <a:lnTo>
+                    <a:pt x="1084250" y="1900531"/>
+                  </a:lnTo>
+                  <a:lnTo>
+                    <a:pt x="1084250" y="1823885"/>
+                  </a:lnTo>
+                  <a:lnTo>
+                    <a:pt x="1167653" y="1823885"/>
+                  </a:lnTo>
+                  <a:lnTo>
+                    <a:pt x="1167653" y="1749900"/>
+                  </a:lnTo>
+                  <a:lnTo>
+                    <a:pt x="1417865" y="1749900"/>
+                  </a:lnTo>
+                  <a:lnTo>
+                    <a:pt x="1417865" y="1608474"/>
+                  </a:lnTo>
+                  <a:lnTo>
+                    <a:pt x="1501269" y="1608474"/>
+                  </a:lnTo>
+                  <a:lnTo>
+                    <a:pt x="1501269" y="1537134"/>
+                  </a:lnTo>
+                  <a:lnTo>
+                    <a:pt x="2001692" y="1537134"/>
+                  </a:lnTo>
+                  <a:lnTo>
+                    <a:pt x="2001692" y="1463024"/>
+                  </a:lnTo>
+                  <a:lnTo>
+                    <a:pt x="2168500" y="1463024"/>
+                  </a:lnTo>
+                  <a:lnTo>
+                    <a:pt x="2168500" y="1389877"/>
+                  </a:lnTo>
+                  <a:lnTo>
+                    <a:pt x="2585519" y="1389877"/>
+                  </a:lnTo>
+                  <a:lnTo>
+                    <a:pt x="2585519" y="1318892"/>
+                  </a:lnTo>
+                  <a:lnTo>
+                    <a:pt x="3085942" y="1318892"/>
+                  </a:lnTo>
+                  <a:lnTo>
+                    <a:pt x="3085942" y="1181947"/>
+                  </a:lnTo>
+                  <a:lnTo>
+                    <a:pt x="3169346" y="1181947"/>
+                  </a:lnTo>
+                  <a:lnTo>
+                    <a:pt x="3169346" y="924672"/>
+                  </a:lnTo>
+                  <a:lnTo>
+                    <a:pt x="3336154" y="924672"/>
+                  </a:lnTo>
+                  <a:lnTo>
+                    <a:pt x="3336154" y="859946"/>
+                  </a:lnTo>
+                  <a:lnTo>
+                    <a:pt x="3419557" y="859946"/>
+                  </a:lnTo>
+                  <a:lnTo>
+                    <a:pt x="3419557" y="796622"/>
+                  </a:lnTo>
+                  <a:lnTo>
+                    <a:pt x="4253596" y="796622"/>
+                  </a:lnTo>
+                  <a:lnTo>
+                    <a:pt x="4253596" y="734538"/>
+                  </a:lnTo>
+                  <a:lnTo>
+                    <a:pt x="4587211" y="734538"/>
+                  </a:lnTo>
+                  <a:lnTo>
+                    <a:pt x="4587211" y="673978"/>
+                  </a:lnTo>
+                  <a:lnTo>
+                    <a:pt x="4670615" y="673978"/>
+                  </a:lnTo>
+                  <a:lnTo>
+                    <a:pt x="4670615" y="614799"/>
+                  </a:lnTo>
+                  <a:lnTo>
+                    <a:pt x="4920827" y="614799"/>
+                  </a:lnTo>
+                  <a:lnTo>
+                    <a:pt x="4920827" y="391936"/>
+                  </a:lnTo>
+                  <a:lnTo>
+                    <a:pt x="5004231" y="391936"/>
+                  </a:lnTo>
+                  <a:lnTo>
+                    <a:pt x="5004231" y="334171"/>
+                  </a:lnTo>
+                  <a:lnTo>
+                    <a:pt x="5671461" y="334171"/>
+                  </a:lnTo>
+                  <a:lnTo>
+                    <a:pt x="5671461" y="277685"/>
+                  </a:lnTo>
+                  <a:lnTo>
+                    <a:pt x="6338692" y="277685"/>
+                  </a:lnTo>
+                  <a:lnTo>
+                    <a:pt x="6338692" y="221361"/>
+                  </a:lnTo>
+                  <a:lnTo>
+                    <a:pt x="6672308" y="221361"/>
+                  </a:lnTo>
+                  <a:lnTo>
+                    <a:pt x="6672308" y="54184"/>
+                  </a:lnTo>
+                  <a:lnTo>
+                    <a:pt x="7005923" y="54184"/>
                   </a:lnTo>
                   <a:lnTo>
                     <a:pt x="7005923" y="0"/>
@@ -3477,7 +3477,7 @@
           </p:nvSpPr>
           <p:spPr>
             <a:xfrm>
-              <a:off x="692708" y="4886535"/>
+              <a:off x="692708" y="4879018"/>
               <a:ext cx="155356" cy="80101"/>
             </a:xfrm>
             <a:prstGeom prst="rect">
@@ -3523,7 +3523,7 @@
           </p:nvSpPr>
           <p:spPr>
             <a:xfrm>
-              <a:off x="692708" y="4232698"/>
+              <a:off x="692708" y="4217664"/>
               <a:ext cx="155356" cy="80101"/>
             </a:xfrm>
             <a:prstGeom prst="rect">
@@ -3569,7 +3569,7 @@
           </p:nvSpPr>
           <p:spPr>
             <a:xfrm>
-              <a:off x="692708" y="3578862"/>
+              <a:off x="692708" y="3556311"/>
               <a:ext cx="155356" cy="80101"/>
             </a:xfrm>
             <a:prstGeom prst="rect">
@@ -3615,7 +3615,7 @@
           </p:nvSpPr>
           <p:spPr>
             <a:xfrm>
-              <a:off x="692708" y="2925026"/>
+              <a:off x="692708" y="2894957"/>
               <a:ext cx="155356" cy="80101"/>
             </a:xfrm>
             <a:prstGeom prst="rect">
@@ -4142,7 +4142,7 @@
                   <a:latin typeface="Helvetica"/>
                   <a:cs typeface="Helvetica"/>
                 </a:rPr>
-                <a:t>Discrep &gt;= +25 vs &lt;+25: subHR = 1.66 (95% CI 0.81-3.39), p = 0.164</a:t>
+                <a:t>Discrep &gt;= +25 vs &lt;+25: subHR = 1.59 (95% CI 0.77-3.27), p = 0.206</a:t>
               </a:r>
             </a:p>
           </p:txBody>

--- a/docs/plots/carbo/jx_carbo_adjcif_anemia2.pptx
+++ b/docs/plots/carbo/jx_carbo_adjcif_anemia2.pptx
@@ -3046,17 +3046,17 @@
           <p:spPr>
             <a:xfrm>
               <a:off x="1260991" y="3516930"/>
-              <a:ext cx="7005923" cy="2020103"/>
+              <a:ext cx="7005923" cy="2020104"/>
             </a:xfrm>
             <a:custGeom>
               <a:avLst/>
               <a:pathLst>
-                <a:path w="7005923" h="2020103">
+                <a:path w="7005923" h="2020104">
                   <a:moveTo>
-                    <a:pt x="0" y="2020103"/>
+                    <a:pt x="0" y="2020104"/>
                   </a:moveTo>
                   <a:lnTo>
-                    <a:pt x="166807" y="2020103"/>
+                    <a:pt x="166807" y="2020104"/>
                   </a:lnTo>
                   <a:lnTo>
                     <a:pt x="166807" y="1976263"/>
@@ -3071,10 +3071,10 @@
                     <a:pt x="417019" y="1890449"/>
                   </a:lnTo>
                   <a:lnTo>
-                    <a:pt x="417019" y="1845050"/>
-                  </a:lnTo>
-                  <a:lnTo>
-                    <a:pt x="583826" y="1845050"/>
+                    <a:pt x="417019" y="1845051"/>
+                  </a:lnTo>
+                  <a:lnTo>
+                    <a:pt x="583826" y="1845051"/>
                   </a:lnTo>
                   <a:lnTo>
                     <a:pt x="583826" y="1669900"/>
@@ -3569,7 +3569,7 @@
           </p:nvSpPr>
           <p:spPr>
             <a:xfrm>
-              <a:off x="692708" y="3556311"/>
+              <a:off x="692708" y="3556310"/>
               <a:ext cx="155356" cy="80101"/>
             </a:xfrm>
             <a:prstGeom prst="rect">

--- a/docs/plots/carbo/jx_carbo_adjcif_anemia2.pptx
+++ b/docs/plots/carbo/jx_carbo_adjcif_anemia2.pptx
@@ -2271,26 +2271,26 @@
           </p:nvSpPr>
           <p:spPr>
             <a:xfrm>
-              <a:off x="910695" y="5249745"/>
-              <a:ext cx="7706515" cy="0"/>
+              <a:off x="1034151" y="5186567"/>
+              <a:ext cx="7564080" cy="0"/>
             </a:xfrm>
             <a:custGeom>
               <a:avLst/>
               <a:pathLst>
-                <a:path w="7706515" h="0">
+                <a:path w="7564080" h="0">
                   <a:moveTo>
                     <a:pt x="0" y="0"/>
                   </a:moveTo>
                   <a:lnTo>
-                    <a:pt x="7706515" y="0"/>
-                  </a:lnTo>
-                  <a:lnTo>
-                    <a:pt x="7706515" y="0"/>
+                    <a:pt x="7564080" y="0"/>
+                  </a:lnTo>
+                  <a:lnTo>
+                    <a:pt x="7564080" y="0"/>
                   </a:lnTo>
                 </a:path>
               </a:pathLst>
             </a:custGeom>
-            <a:ln w="6775" cap="flat">
+            <a:ln w="8623" cap="flat">
               <a:solidFill>
                 <a:srgbClr val="EBEBEB">
                   <a:alpha val="100000"/>
@@ -2314,26 +2314,26 @@
           </p:nvSpPr>
           <p:spPr>
             <a:xfrm>
-              <a:off x="910695" y="4588391"/>
-              <a:ext cx="7706515" cy="0"/>
+              <a:off x="1034151" y="4590391"/>
+              <a:ext cx="7564080" cy="0"/>
             </a:xfrm>
             <a:custGeom>
               <a:avLst/>
               <a:pathLst>
-                <a:path w="7706515" h="0">
+                <a:path w="7564080" h="0">
                   <a:moveTo>
                     <a:pt x="0" y="0"/>
                   </a:moveTo>
                   <a:lnTo>
-                    <a:pt x="7706515" y="0"/>
-                  </a:lnTo>
-                  <a:lnTo>
-                    <a:pt x="7706515" y="0"/>
+                    <a:pt x="7564080" y="0"/>
+                  </a:lnTo>
+                  <a:lnTo>
+                    <a:pt x="7564080" y="0"/>
                   </a:lnTo>
                 </a:path>
               </a:pathLst>
             </a:custGeom>
-            <a:ln w="6775" cap="flat">
+            <a:ln w="8623" cap="flat">
               <a:solidFill>
                 <a:srgbClr val="EBEBEB">
                   <a:alpha val="100000"/>
@@ -2357,26 +2357,26 @@
           </p:nvSpPr>
           <p:spPr>
             <a:xfrm>
-              <a:off x="910695" y="3927038"/>
-              <a:ext cx="7706515" cy="0"/>
+              <a:off x="1034151" y="3994214"/>
+              <a:ext cx="7564080" cy="0"/>
             </a:xfrm>
             <a:custGeom>
               <a:avLst/>
               <a:pathLst>
-                <a:path w="7706515" h="0">
+                <a:path w="7564080" h="0">
                   <a:moveTo>
                     <a:pt x="0" y="0"/>
                   </a:moveTo>
                   <a:lnTo>
-                    <a:pt x="7706515" y="0"/>
-                  </a:lnTo>
-                  <a:lnTo>
-                    <a:pt x="7706515" y="0"/>
+                    <a:pt x="7564080" y="0"/>
+                  </a:lnTo>
+                  <a:lnTo>
+                    <a:pt x="7564080" y="0"/>
                   </a:lnTo>
                 </a:path>
               </a:pathLst>
             </a:custGeom>
-            <a:ln w="6775" cap="flat">
+            <a:ln w="8623" cap="flat">
               <a:solidFill>
                 <a:srgbClr val="EBEBEB">
                   <a:alpha val="100000"/>
@@ -2400,26 +2400,26 @@
           </p:nvSpPr>
           <p:spPr>
             <a:xfrm>
-              <a:off x="910695" y="3265684"/>
-              <a:ext cx="7706515" cy="0"/>
+              <a:off x="1034151" y="3398037"/>
+              <a:ext cx="7564080" cy="0"/>
             </a:xfrm>
             <a:custGeom>
               <a:avLst/>
               <a:pathLst>
-                <a:path w="7706515" h="0">
+                <a:path w="7564080" h="0">
                   <a:moveTo>
                     <a:pt x="0" y="0"/>
                   </a:moveTo>
                   <a:lnTo>
-                    <a:pt x="7706515" y="0"/>
-                  </a:lnTo>
-                  <a:lnTo>
-                    <a:pt x="7706515" y="0"/>
+                    <a:pt x="7564080" y="0"/>
+                  </a:lnTo>
+                  <a:lnTo>
+                    <a:pt x="7564080" y="0"/>
                   </a:lnTo>
                 </a:path>
               </a:pathLst>
             </a:custGeom>
-            <a:ln w="6775" cap="flat">
+            <a:ln w="8623" cap="flat">
               <a:solidFill>
                 <a:srgbClr val="EBEBEB">
                   <a:alpha val="100000"/>
@@ -2443,26 +2443,26 @@
           </p:nvSpPr>
           <p:spPr>
             <a:xfrm>
-              <a:off x="910695" y="2604331"/>
-              <a:ext cx="7706515" cy="0"/>
+              <a:off x="1034151" y="2801861"/>
+              <a:ext cx="7564080" cy="0"/>
             </a:xfrm>
             <a:custGeom>
               <a:avLst/>
               <a:pathLst>
-                <a:path w="7706515" h="0">
+                <a:path w="7564080" h="0">
                   <a:moveTo>
                     <a:pt x="0" y="0"/>
                   </a:moveTo>
                   <a:lnTo>
-                    <a:pt x="7706515" y="0"/>
-                  </a:lnTo>
-                  <a:lnTo>
-                    <a:pt x="7706515" y="0"/>
+                    <a:pt x="7564080" y="0"/>
+                  </a:lnTo>
+                  <a:lnTo>
+                    <a:pt x="7564080" y="0"/>
                   </a:lnTo>
                 </a:path>
               </a:pathLst>
             </a:custGeom>
-            <a:ln w="6775" cap="flat">
+            <a:ln w="8623" cap="flat">
               <a:solidFill>
                 <a:srgbClr val="EBEBEB">
                   <a:alpha val="100000"/>
@@ -2486,15 +2486,15 @@
           </p:nvSpPr>
           <p:spPr>
             <a:xfrm>
-              <a:off x="1969924" y="2583293"/>
-              <a:ext cx="0" cy="3139848"/>
+              <a:off x="2073803" y="2782896"/>
+              <a:ext cx="0" cy="2830414"/>
             </a:xfrm>
             <a:custGeom>
               <a:avLst/>
               <a:pathLst>
-                <a:path w="0" h="3139848">
+                <a:path w="0" h="2830414">
                   <a:moveTo>
-                    <a:pt x="0" y="3139848"/>
+                    <a:pt x="0" y="2830414"/>
                   </a:moveTo>
                   <a:lnTo>
                     <a:pt x="0" y="0"/>
@@ -2505,7 +2505,7 @@
                 </a:path>
               </a:pathLst>
             </a:custGeom>
-            <a:ln w="6775" cap="flat">
+            <a:ln w="8623" cap="flat">
               <a:solidFill>
                 <a:srgbClr val="EBEBEB">
                   <a:alpha val="100000"/>
@@ -2529,15 +2529,15 @@
           </p:nvSpPr>
           <p:spPr>
             <a:xfrm>
-              <a:off x="4055020" y="2583293"/>
-              <a:ext cx="0" cy="3139848"/>
+              <a:off x="4120361" y="2782896"/>
+              <a:ext cx="0" cy="2830414"/>
             </a:xfrm>
             <a:custGeom>
               <a:avLst/>
               <a:pathLst>
-                <a:path w="0" h="3139848">
+                <a:path w="0" h="2830414">
                   <a:moveTo>
-                    <a:pt x="0" y="3139848"/>
+                    <a:pt x="0" y="2830414"/>
                   </a:moveTo>
                   <a:lnTo>
                     <a:pt x="0" y="0"/>
@@ -2548,7 +2548,7 @@
                 </a:path>
               </a:pathLst>
             </a:custGeom>
-            <a:ln w="6775" cap="flat">
+            <a:ln w="8623" cap="flat">
               <a:solidFill>
                 <a:srgbClr val="EBEBEB">
                   <a:alpha val="100000"/>
@@ -2572,15 +2572,15 @@
           </p:nvSpPr>
           <p:spPr>
             <a:xfrm>
-              <a:off x="6140116" y="2583293"/>
-              <a:ext cx="0" cy="3139848"/>
+              <a:off x="6166920" y="2782896"/>
+              <a:ext cx="0" cy="2830414"/>
             </a:xfrm>
             <a:custGeom>
               <a:avLst/>
               <a:pathLst>
-                <a:path w="0" h="3139848">
+                <a:path w="0" h="2830414">
                   <a:moveTo>
-                    <a:pt x="0" y="3139848"/>
+                    <a:pt x="0" y="2830414"/>
                   </a:moveTo>
                   <a:lnTo>
                     <a:pt x="0" y="0"/>
@@ -2591,7 +2591,7 @@
                 </a:path>
               </a:pathLst>
             </a:custGeom>
-            <a:ln w="6775" cap="flat">
+            <a:ln w="8623" cap="flat">
               <a:solidFill>
                 <a:srgbClr val="EBEBEB">
                   <a:alpha val="100000"/>
@@ -2615,15 +2615,15 @@
           </p:nvSpPr>
           <p:spPr>
             <a:xfrm>
-              <a:off x="8225212" y="2583293"/>
-              <a:ext cx="0" cy="3139848"/>
+              <a:off x="8213479" y="2782896"/>
+              <a:ext cx="0" cy="2830414"/>
             </a:xfrm>
             <a:custGeom>
               <a:avLst/>
               <a:pathLst>
-                <a:path w="0" h="3139848">
+                <a:path w="0" h="2830414">
                   <a:moveTo>
-                    <a:pt x="0" y="3139848"/>
+                    <a:pt x="0" y="2830414"/>
                   </a:moveTo>
                   <a:lnTo>
                     <a:pt x="0" y="0"/>
@@ -2634,7 +2634,7 @@
                 </a:path>
               </a:pathLst>
             </a:custGeom>
-            <a:ln w="6775" cap="flat">
+            <a:ln w="8623" cap="flat">
               <a:solidFill>
                 <a:srgbClr val="EBEBEB">
                   <a:alpha val="100000"/>
@@ -2658,26 +2658,26 @@
           </p:nvSpPr>
           <p:spPr>
             <a:xfrm>
-              <a:off x="910695" y="5580422"/>
-              <a:ext cx="7706515" cy="0"/>
+              <a:off x="1034151" y="5484655"/>
+              <a:ext cx="7564080" cy="0"/>
             </a:xfrm>
             <a:custGeom>
               <a:avLst/>
               <a:pathLst>
-                <a:path w="7706515" h="0">
+                <a:path w="7564080" h="0">
                   <a:moveTo>
                     <a:pt x="0" y="0"/>
                   </a:moveTo>
                   <a:lnTo>
-                    <a:pt x="7706515" y="0"/>
-                  </a:lnTo>
-                  <a:lnTo>
-                    <a:pt x="7706515" y="0"/>
+                    <a:pt x="7564080" y="0"/>
+                  </a:lnTo>
+                  <a:lnTo>
+                    <a:pt x="7564080" y="0"/>
                   </a:lnTo>
                 </a:path>
               </a:pathLst>
             </a:custGeom>
-            <a:ln w="13550" cap="flat">
+            <a:ln w="17246" cap="flat">
               <a:solidFill>
                 <a:srgbClr val="EBEBEB">
                   <a:alpha val="100000"/>
@@ -2701,26 +2701,26 @@
           </p:nvSpPr>
           <p:spPr>
             <a:xfrm>
-              <a:off x="910695" y="4919068"/>
-              <a:ext cx="7706515" cy="0"/>
+              <a:off x="1034151" y="4888479"/>
+              <a:ext cx="7564080" cy="0"/>
             </a:xfrm>
             <a:custGeom>
               <a:avLst/>
               <a:pathLst>
-                <a:path w="7706515" h="0">
+                <a:path w="7564080" h="0">
                   <a:moveTo>
                     <a:pt x="0" y="0"/>
                   </a:moveTo>
                   <a:lnTo>
-                    <a:pt x="7706515" y="0"/>
-                  </a:lnTo>
-                  <a:lnTo>
-                    <a:pt x="7706515" y="0"/>
+                    <a:pt x="7564080" y="0"/>
+                  </a:lnTo>
+                  <a:lnTo>
+                    <a:pt x="7564080" y="0"/>
                   </a:lnTo>
                 </a:path>
               </a:pathLst>
             </a:custGeom>
-            <a:ln w="13550" cap="flat">
+            <a:ln w="17246" cap="flat">
               <a:solidFill>
                 <a:srgbClr val="EBEBEB">
                   <a:alpha val="100000"/>
@@ -2744,26 +2744,26 @@
           </p:nvSpPr>
           <p:spPr>
             <a:xfrm>
-              <a:off x="910695" y="4257715"/>
-              <a:ext cx="7706515" cy="0"/>
+              <a:off x="1034151" y="4292302"/>
+              <a:ext cx="7564080" cy="0"/>
             </a:xfrm>
             <a:custGeom>
               <a:avLst/>
               <a:pathLst>
-                <a:path w="7706515" h="0">
+                <a:path w="7564080" h="0">
                   <a:moveTo>
                     <a:pt x="0" y="0"/>
                   </a:moveTo>
                   <a:lnTo>
-                    <a:pt x="7706515" y="0"/>
-                  </a:lnTo>
-                  <a:lnTo>
-                    <a:pt x="7706515" y="0"/>
+                    <a:pt x="7564080" y="0"/>
+                  </a:lnTo>
+                  <a:lnTo>
+                    <a:pt x="7564080" y="0"/>
                   </a:lnTo>
                 </a:path>
               </a:pathLst>
             </a:custGeom>
-            <a:ln w="13550" cap="flat">
+            <a:ln w="17246" cap="flat">
               <a:solidFill>
                 <a:srgbClr val="EBEBEB">
                   <a:alpha val="100000"/>
@@ -2787,26 +2787,26 @@
           </p:nvSpPr>
           <p:spPr>
             <a:xfrm>
-              <a:off x="910695" y="3596361"/>
-              <a:ext cx="7706515" cy="0"/>
+              <a:off x="1034151" y="3696126"/>
+              <a:ext cx="7564080" cy="0"/>
             </a:xfrm>
             <a:custGeom>
               <a:avLst/>
               <a:pathLst>
-                <a:path w="7706515" h="0">
+                <a:path w="7564080" h="0">
                   <a:moveTo>
                     <a:pt x="0" y="0"/>
                   </a:moveTo>
                   <a:lnTo>
-                    <a:pt x="7706515" y="0"/>
-                  </a:lnTo>
-                  <a:lnTo>
-                    <a:pt x="7706515" y="0"/>
+                    <a:pt x="7564080" y="0"/>
+                  </a:lnTo>
+                  <a:lnTo>
+                    <a:pt x="7564080" y="0"/>
                   </a:lnTo>
                 </a:path>
               </a:pathLst>
             </a:custGeom>
-            <a:ln w="13550" cap="flat">
+            <a:ln w="17246" cap="flat">
               <a:solidFill>
                 <a:srgbClr val="EBEBEB">
                   <a:alpha val="100000"/>
@@ -2830,26 +2830,26 @@
           </p:nvSpPr>
           <p:spPr>
             <a:xfrm>
-              <a:off x="910695" y="2935008"/>
-              <a:ext cx="7706515" cy="0"/>
+              <a:off x="1034151" y="3099949"/>
+              <a:ext cx="7564080" cy="0"/>
             </a:xfrm>
             <a:custGeom>
               <a:avLst/>
               <a:pathLst>
-                <a:path w="7706515" h="0">
+                <a:path w="7564080" h="0">
                   <a:moveTo>
                     <a:pt x="0" y="0"/>
                   </a:moveTo>
                   <a:lnTo>
-                    <a:pt x="7706515" y="0"/>
-                  </a:lnTo>
-                  <a:lnTo>
-                    <a:pt x="7706515" y="0"/>
+                    <a:pt x="7564080" y="0"/>
+                  </a:lnTo>
+                  <a:lnTo>
+                    <a:pt x="7564080" y="0"/>
                   </a:lnTo>
                 </a:path>
               </a:pathLst>
             </a:custGeom>
-            <a:ln w="13550" cap="flat">
+            <a:ln w="17246" cap="flat">
               <a:solidFill>
                 <a:srgbClr val="EBEBEB">
                   <a:alpha val="100000"/>
@@ -2873,15 +2873,15 @@
           </p:nvSpPr>
           <p:spPr>
             <a:xfrm>
-              <a:off x="927375" y="2583293"/>
-              <a:ext cx="0" cy="3139848"/>
+              <a:off x="1050523" y="2782896"/>
+              <a:ext cx="0" cy="2830414"/>
             </a:xfrm>
             <a:custGeom>
               <a:avLst/>
               <a:pathLst>
-                <a:path w="0" h="3139848">
+                <a:path w="0" h="2830414">
                   <a:moveTo>
-                    <a:pt x="0" y="3139848"/>
+                    <a:pt x="0" y="2830414"/>
                   </a:moveTo>
                   <a:lnTo>
                     <a:pt x="0" y="0"/>
@@ -2892,7 +2892,7 @@
                 </a:path>
               </a:pathLst>
             </a:custGeom>
-            <a:ln w="13550" cap="flat">
+            <a:ln w="17246" cap="flat">
               <a:solidFill>
                 <a:srgbClr val="EBEBEB">
                   <a:alpha val="100000"/>
@@ -2916,15 +2916,15 @@
           </p:nvSpPr>
           <p:spPr>
             <a:xfrm>
-              <a:off x="3012472" y="2583293"/>
-              <a:ext cx="0" cy="3139848"/>
+              <a:off x="3097082" y="2782896"/>
+              <a:ext cx="0" cy="2830414"/>
             </a:xfrm>
             <a:custGeom>
               <a:avLst/>
               <a:pathLst>
-                <a:path w="0" h="3139848">
+                <a:path w="0" h="2830414">
                   <a:moveTo>
-                    <a:pt x="0" y="3139848"/>
+                    <a:pt x="0" y="2830414"/>
                   </a:moveTo>
                   <a:lnTo>
                     <a:pt x="0" y="0"/>
@@ -2935,7 +2935,7 @@
                 </a:path>
               </a:pathLst>
             </a:custGeom>
-            <a:ln w="13550" cap="flat">
+            <a:ln w="17246" cap="flat">
               <a:solidFill>
                 <a:srgbClr val="EBEBEB">
                   <a:alpha val="100000"/>
@@ -2959,15 +2959,15 @@
           </p:nvSpPr>
           <p:spPr>
             <a:xfrm>
-              <a:off x="5097568" y="2583293"/>
-              <a:ext cx="0" cy="3139848"/>
+              <a:off x="5143641" y="2782896"/>
+              <a:ext cx="0" cy="2830414"/>
             </a:xfrm>
             <a:custGeom>
               <a:avLst/>
               <a:pathLst>
-                <a:path w="0" h="3139848">
+                <a:path w="0" h="2830414">
                   <a:moveTo>
-                    <a:pt x="0" y="3139848"/>
+                    <a:pt x="0" y="2830414"/>
                   </a:moveTo>
                   <a:lnTo>
                     <a:pt x="0" y="0"/>
@@ -2978,7 +2978,7 @@
                 </a:path>
               </a:pathLst>
             </a:custGeom>
-            <a:ln w="13550" cap="flat">
+            <a:ln w="17246" cap="flat">
               <a:solidFill>
                 <a:srgbClr val="EBEBEB">
                   <a:alpha val="100000"/>
@@ -3002,15 +3002,15 @@
           </p:nvSpPr>
           <p:spPr>
             <a:xfrm>
-              <a:off x="7182664" y="2583293"/>
-              <a:ext cx="0" cy="3139848"/>
+              <a:off x="7190199" y="2782896"/>
+              <a:ext cx="0" cy="2830414"/>
             </a:xfrm>
             <a:custGeom>
               <a:avLst/>
               <a:pathLst>
-                <a:path w="0" h="3139848">
+                <a:path w="0" h="2830414">
                   <a:moveTo>
-                    <a:pt x="0" y="3139848"/>
+                    <a:pt x="0" y="2830414"/>
                   </a:moveTo>
                   <a:lnTo>
                     <a:pt x="0" y="0"/>
@@ -3021,7 +3021,7 @@
                 </a:path>
               </a:pathLst>
             </a:custGeom>
-            <a:ln w="13550" cap="flat">
+            <a:ln w="17246" cap="flat">
               <a:solidFill>
                 <a:srgbClr val="EBEBEB">
                   <a:alpha val="100000"/>
@@ -3045,171 +3045,171 @@
           </p:nvSpPr>
           <p:spPr>
             <a:xfrm>
-              <a:off x="1260991" y="3516930"/>
-              <a:ext cx="7005923" cy="2020104"/>
+              <a:off x="1377973" y="3624523"/>
+              <a:ext cx="6876437" cy="1821021"/>
             </a:xfrm>
             <a:custGeom>
               <a:avLst/>
               <a:pathLst>
-                <a:path w="7005923" h="2020104">
+                <a:path w="6876437" h="1821021">
                   <a:moveTo>
-                    <a:pt x="0" y="2020104"/>
+                    <a:pt x="0" y="1821021"/>
                   </a:moveTo>
                   <a:lnTo>
-                    <a:pt x="166807" y="2020104"/>
-                  </a:lnTo>
-                  <a:lnTo>
-                    <a:pt x="166807" y="1976263"/>
-                  </a:lnTo>
-                  <a:lnTo>
-                    <a:pt x="250211" y="1976263"/>
-                  </a:lnTo>
-                  <a:lnTo>
-                    <a:pt x="250211" y="1890449"/>
-                  </a:lnTo>
-                  <a:lnTo>
-                    <a:pt x="417019" y="1890449"/>
-                  </a:lnTo>
-                  <a:lnTo>
-                    <a:pt x="417019" y="1845051"/>
-                  </a:lnTo>
-                  <a:lnTo>
-                    <a:pt x="583826" y="1845051"/>
-                  </a:lnTo>
-                  <a:lnTo>
-                    <a:pt x="583826" y="1669900"/>
-                  </a:lnTo>
-                  <a:lnTo>
-                    <a:pt x="667230" y="1669900"/>
-                  </a:lnTo>
-                  <a:lnTo>
-                    <a:pt x="667230" y="1617258"/>
-                  </a:lnTo>
-                  <a:lnTo>
-                    <a:pt x="750634" y="1617258"/>
-                  </a:lnTo>
-                  <a:lnTo>
-                    <a:pt x="750634" y="1511090"/>
-                  </a:lnTo>
-                  <a:lnTo>
-                    <a:pt x="1084250" y="1511090"/>
-                  </a:lnTo>
-                  <a:lnTo>
-                    <a:pt x="1084250" y="1455791"/>
-                  </a:lnTo>
-                  <a:lnTo>
-                    <a:pt x="1167653" y="1455791"/>
-                  </a:lnTo>
-                  <a:lnTo>
-                    <a:pt x="1167653" y="1401907"/>
-                  </a:lnTo>
-                  <a:lnTo>
-                    <a:pt x="1417865" y="1401907"/>
-                  </a:lnTo>
-                  <a:lnTo>
-                    <a:pt x="1417865" y="1297565"/>
-                  </a:lnTo>
-                  <a:lnTo>
-                    <a:pt x="1501269" y="1297565"/>
-                  </a:lnTo>
-                  <a:lnTo>
-                    <a:pt x="1501269" y="1244285"/>
-                  </a:lnTo>
-                  <a:lnTo>
-                    <a:pt x="2001692" y="1244285"/>
-                  </a:lnTo>
-                  <a:lnTo>
-                    <a:pt x="2001692" y="1188487"/>
-                  </a:lnTo>
-                  <a:lnTo>
-                    <a:pt x="2168500" y="1188487"/>
-                  </a:lnTo>
-                  <a:lnTo>
-                    <a:pt x="2168500" y="1132974"/>
-                  </a:lnTo>
-                  <a:lnTo>
-                    <a:pt x="2585519" y="1132974"/>
-                  </a:lnTo>
-                  <a:lnTo>
-                    <a:pt x="2585519" y="1078691"/>
-                  </a:lnTo>
-                  <a:lnTo>
-                    <a:pt x="3085942" y="1078691"/>
-                  </a:lnTo>
-                  <a:lnTo>
-                    <a:pt x="3085942" y="972838"/>
-                  </a:lnTo>
-                  <a:lnTo>
-                    <a:pt x="3169346" y="972838"/>
-                  </a:lnTo>
-                  <a:lnTo>
-                    <a:pt x="3169346" y="770044"/>
-                  </a:lnTo>
-                  <a:lnTo>
-                    <a:pt x="3336154" y="770044"/>
-                  </a:lnTo>
-                  <a:lnTo>
-                    <a:pt x="3336154" y="718228"/>
-                  </a:lnTo>
-                  <a:lnTo>
-                    <a:pt x="3419557" y="718228"/>
-                  </a:lnTo>
-                  <a:lnTo>
-                    <a:pt x="3419557" y="667229"/>
-                  </a:lnTo>
-                  <a:lnTo>
-                    <a:pt x="4253596" y="667229"/>
-                  </a:lnTo>
-                  <a:lnTo>
-                    <a:pt x="4253596" y="616935"/>
-                  </a:lnTo>
-                  <a:lnTo>
-                    <a:pt x="4587211" y="616935"/>
-                  </a:lnTo>
-                  <a:lnTo>
-                    <a:pt x="4587211" y="567597"/>
-                  </a:lnTo>
-                  <a:lnTo>
-                    <a:pt x="4670615" y="567597"/>
-                  </a:lnTo>
-                  <a:lnTo>
-                    <a:pt x="4670615" y="519118"/>
-                  </a:lnTo>
-                  <a:lnTo>
-                    <a:pt x="4920827" y="519118"/>
-                  </a:lnTo>
-                  <a:lnTo>
-                    <a:pt x="4920827" y="334206"/>
-                  </a:lnTo>
-                  <a:lnTo>
-                    <a:pt x="5004231" y="334206"/>
-                  </a:lnTo>
-                  <a:lnTo>
-                    <a:pt x="5004231" y="285673"/>
-                  </a:lnTo>
-                  <a:lnTo>
-                    <a:pt x="5671461" y="285673"/>
-                  </a:lnTo>
-                  <a:lnTo>
-                    <a:pt x="5671461" y="237974"/>
-                  </a:lnTo>
-                  <a:lnTo>
-                    <a:pt x="6338692" y="237974"/>
-                  </a:lnTo>
-                  <a:lnTo>
-                    <a:pt x="6338692" y="190173"/>
-                  </a:lnTo>
-                  <a:lnTo>
-                    <a:pt x="6672308" y="190173"/>
-                  </a:lnTo>
-                  <a:lnTo>
-                    <a:pt x="6672308" y="46892"/>
-                  </a:lnTo>
-                  <a:lnTo>
-                    <a:pt x="7005923" y="46892"/>
-                  </a:lnTo>
-                  <a:lnTo>
-                    <a:pt x="7005923" y="0"/>
+                    <a:pt x="163724" y="1821021"/>
+                  </a:lnTo>
+                  <a:lnTo>
+                    <a:pt x="163724" y="1781501"/>
+                  </a:lnTo>
+                  <a:lnTo>
+                    <a:pt x="245587" y="1781501"/>
+                  </a:lnTo>
+                  <a:lnTo>
+                    <a:pt x="245587" y="1704144"/>
+                  </a:lnTo>
+                  <a:lnTo>
+                    <a:pt x="409311" y="1704144"/>
+                  </a:lnTo>
+                  <a:lnTo>
+                    <a:pt x="409311" y="1663219"/>
+                  </a:lnTo>
+                  <a:lnTo>
+                    <a:pt x="573036" y="1663219"/>
+                  </a:lnTo>
+                  <a:lnTo>
+                    <a:pt x="573036" y="1505330"/>
+                  </a:lnTo>
+                  <a:lnTo>
+                    <a:pt x="654898" y="1505330"/>
+                  </a:lnTo>
+                  <a:lnTo>
+                    <a:pt x="654898" y="1457876"/>
+                  </a:lnTo>
+                  <a:lnTo>
+                    <a:pt x="736761" y="1457876"/>
+                  </a:lnTo>
+                  <a:lnTo>
+                    <a:pt x="736761" y="1362171"/>
+                  </a:lnTo>
+                  <a:lnTo>
+                    <a:pt x="1064210" y="1362171"/>
+                  </a:lnTo>
+                  <a:lnTo>
+                    <a:pt x="1064210" y="1312322"/>
+                  </a:lnTo>
+                  <a:lnTo>
+                    <a:pt x="1146072" y="1312322"/>
+                  </a:lnTo>
+                  <a:lnTo>
+                    <a:pt x="1146072" y="1263748"/>
+                  </a:lnTo>
+                  <a:lnTo>
+                    <a:pt x="1391659" y="1263748"/>
+                  </a:lnTo>
+                  <a:lnTo>
+                    <a:pt x="1391659" y="1169689"/>
+                  </a:lnTo>
+                  <a:lnTo>
+                    <a:pt x="1473522" y="1169689"/>
+                  </a:lnTo>
+                  <a:lnTo>
+                    <a:pt x="1473522" y="1121660"/>
+                  </a:lnTo>
+                  <a:lnTo>
+                    <a:pt x="1964696" y="1121660"/>
+                  </a:lnTo>
+                  <a:lnTo>
+                    <a:pt x="1964696" y="1071361"/>
+                  </a:lnTo>
+                  <a:lnTo>
+                    <a:pt x="2128421" y="1071361"/>
+                  </a:lnTo>
+                  <a:lnTo>
+                    <a:pt x="2128421" y="1021319"/>
+                  </a:lnTo>
+                  <a:lnTo>
+                    <a:pt x="2537732" y="1021319"/>
+                  </a:lnTo>
+                  <a:lnTo>
+                    <a:pt x="2537732" y="972385"/>
+                  </a:lnTo>
+                  <a:lnTo>
+                    <a:pt x="3028906" y="972385"/>
+                  </a:lnTo>
+                  <a:lnTo>
+                    <a:pt x="3028906" y="876964"/>
+                  </a:lnTo>
+                  <a:lnTo>
+                    <a:pt x="3110769" y="876964"/>
+                  </a:lnTo>
+                  <a:lnTo>
+                    <a:pt x="3110769" y="694156"/>
+                  </a:lnTo>
+                  <a:lnTo>
+                    <a:pt x="3274493" y="694156"/>
+                  </a:lnTo>
+                  <a:lnTo>
+                    <a:pt x="3274493" y="647446"/>
+                  </a:lnTo>
+                  <a:lnTo>
+                    <a:pt x="3356356" y="647446"/>
+                  </a:lnTo>
+                  <a:lnTo>
+                    <a:pt x="3356356" y="601473"/>
+                  </a:lnTo>
+                  <a:lnTo>
+                    <a:pt x="4174979" y="601473"/>
+                  </a:lnTo>
+                  <a:lnTo>
+                    <a:pt x="4174979" y="556135"/>
+                  </a:lnTo>
+                  <a:lnTo>
+                    <a:pt x="4502429" y="556135"/>
+                  </a:lnTo>
+                  <a:lnTo>
+                    <a:pt x="4502429" y="511660"/>
+                  </a:lnTo>
+                  <a:lnTo>
+                    <a:pt x="4584291" y="511660"/>
+                  </a:lnTo>
+                  <a:lnTo>
+                    <a:pt x="4584291" y="467958"/>
+                  </a:lnTo>
+                  <a:lnTo>
+                    <a:pt x="4829878" y="467958"/>
+                  </a:lnTo>
+                  <a:lnTo>
+                    <a:pt x="4829878" y="301269"/>
+                  </a:lnTo>
+                  <a:lnTo>
+                    <a:pt x="4911740" y="301269"/>
+                  </a:lnTo>
+                  <a:lnTo>
+                    <a:pt x="4911740" y="257520"/>
+                  </a:lnTo>
+                  <a:lnTo>
+                    <a:pt x="5566639" y="257520"/>
+                  </a:lnTo>
+                  <a:lnTo>
+                    <a:pt x="5566639" y="214521"/>
+                  </a:lnTo>
+                  <a:lnTo>
+                    <a:pt x="6221538" y="214521"/>
+                  </a:lnTo>
+                  <a:lnTo>
+                    <a:pt x="6221538" y="171432"/>
+                  </a:lnTo>
+                  <a:lnTo>
+                    <a:pt x="6548987" y="171432"/>
+                  </a:lnTo>
+                  <a:lnTo>
+                    <a:pt x="6548987" y="42271"/>
+                  </a:lnTo>
+                  <a:lnTo>
+                    <a:pt x="6876437" y="42271"/>
+                  </a:lnTo>
+                  <a:lnTo>
+                    <a:pt x="6876437" y="0"/>
                   </a:lnTo>
                 </a:path>
               </a:pathLst>
@@ -3238,171 +3238,171 @@
           </p:nvSpPr>
           <p:spPr>
             <a:xfrm>
-              <a:off x="1260991" y="2861938"/>
-              <a:ext cx="7005923" cy="2649894"/>
+              <a:off x="1377973" y="3034080"/>
+              <a:ext cx="6876437" cy="2388745"/>
             </a:xfrm>
             <a:custGeom>
               <a:avLst/>
               <a:pathLst>
-                <a:path w="7005923" h="2649894">
+                <a:path w="6876437" h="2388745">
                   <a:moveTo>
-                    <a:pt x="0" y="2649894"/>
+                    <a:pt x="0" y="2388745"/>
                   </a:moveTo>
                   <a:lnTo>
-                    <a:pt x="166807" y="2649894"/>
-                  </a:lnTo>
-                  <a:lnTo>
-                    <a:pt x="166807" y="2581498"/>
-                  </a:lnTo>
-                  <a:lnTo>
-                    <a:pt x="250211" y="2581498"/>
-                  </a:lnTo>
-                  <a:lnTo>
-                    <a:pt x="250211" y="2450069"/>
-                  </a:lnTo>
-                  <a:lnTo>
-                    <a:pt x="417019" y="2450069"/>
-                  </a:lnTo>
-                  <a:lnTo>
-                    <a:pt x="417019" y="2381755"/>
-                  </a:lnTo>
-                  <a:lnTo>
-                    <a:pt x="583826" y="2381755"/>
-                  </a:lnTo>
-                  <a:lnTo>
-                    <a:pt x="583826" y="2125111"/>
-                  </a:lnTo>
-                  <a:lnTo>
-                    <a:pt x="667230" y="2125111"/>
-                  </a:lnTo>
-                  <a:lnTo>
-                    <a:pt x="667230" y="2049889"/>
-                  </a:lnTo>
-                  <a:lnTo>
-                    <a:pt x="750634" y="2049889"/>
-                  </a:lnTo>
-                  <a:lnTo>
-                    <a:pt x="750634" y="1900531"/>
-                  </a:lnTo>
-                  <a:lnTo>
-                    <a:pt x="1084250" y="1900531"/>
-                  </a:lnTo>
-                  <a:lnTo>
-                    <a:pt x="1084250" y="1823885"/>
-                  </a:lnTo>
-                  <a:lnTo>
-                    <a:pt x="1167653" y="1823885"/>
-                  </a:lnTo>
-                  <a:lnTo>
-                    <a:pt x="1167653" y="1749900"/>
-                  </a:lnTo>
-                  <a:lnTo>
-                    <a:pt x="1417865" y="1749900"/>
-                  </a:lnTo>
-                  <a:lnTo>
-                    <a:pt x="1417865" y="1608474"/>
-                  </a:lnTo>
-                  <a:lnTo>
-                    <a:pt x="1501269" y="1608474"/>
-                  </a:lnTo>
-                  <a:lnTo>
-                    <a:pt x="1501269" y="1537134"/>
-                  </a:lnTo>
-                  <a:lnTo>
-                    <a:pt x="2001692" y="1537134"/>
-                  </a:lnTo>
-                  <a:lnTo>
-                    <a:pt x="2001692" y="1463024"/>
-                  </a:lnTo>
-                  <a:lnTo>
-                    <a:pt x="2168500" y="1463024"/>
-                  </a:lnTo>
-                  <a:lnTo>
-                    <a:pt x="2168500" y="1389877"/>
-                  </a:lnTo>
-                  <a:lnTo>
-                    <a:pt x="2585519" y="1389877"/>
-                  </a:lnTo>
-                  <a:lnTo>
-                    <a:pt x="2585519" y="1318892"/>
-                  </a:lnTo>
-                  <a:lnTo>
-                    <a:pt x="3085942" y="1318892"/>
-                  </a:lnTo>
-                  <a:lnTo>
-                    <a:pt x="3085942" y="1181947"/>
-                  </a:lnTo>
-                  <a:lnTo>
-                    <a:pt x="3169346" y="1181947"/>
-                  </a:lnTo>
-                  <a:lnTo>
-                    <a:pt x="3169346" y="924672"/>
-                  </a:lnTo>
-                  <a:lnTo>
-                    <a:pt x="3336154" y="924672"/>
-                  </a:lnTo>
-                  <a:lnTo>
-                    <a:pt x="3336154" y="859946"/>
-                  </a:lnTo>
-                  <a:lnTo>
-                    <a:pt x="3419557" y="859946"/>
-                  </a:lnTo>
-                  <a:lnTo>
-                    <a:pt x="3419557" y="796622"/>
-                  </a:lnTo>
-                  <a:lnTo>
-                    <a:pt x="4253596" y="796622"/>
-                  </a:lnTo>
-                  <a:lnTo>
-                    <a:pt x="4253596" y="734538"/>
-                  </a:lnTo>
-                  <a:lnTo>
-                    <a:pt x="4587211" y="734538"/>
-                  </a:lnTo>
-                  <a:lnTo>
-                    <a:pt x="4587211" y="673978"/>
-                  </a:lnTo>
-                  <a:lnTo>
-                    <a:pt x="4670615" y="673978"/>
-                  </a:lnTo>
-                  <a:lnTo>
-                    <a:pt x="4670615" y="614799"/>
-                  </a:lnTo>
-                  <a:lnTo>
-                    <a:pt x="4920827" y="614799"/>
-                  </a:lnTo>
-                  <a:lnTo>
-                    <a:pt x="4920827" y="391936"/>
-                  </a:lnTo>
-                  <a:lnTo>
-                    <a:pt x="5004231" y="391936"/>
-                  </a:lnTo>
-                  <a:lnTo>
-                    <a:pt x="5004231" y="334171"/>
-                  </a:lnTo>
-                  <a:lnTo>
-                    <a:pt x="5671461" y="334171"/>
-                  </a:lnTo>
-                  <a:lnTo>
-                    <a:pt x="5671461" y="277685"/>
-                  </a:lnTo>
-                  <a:lnTo>
-                    <a:pt x="6338692" y="277685"/>
-                  </a:lnTo>
-                  <a:lnTo>
-                    <a:pt x="6338692" y="221361"/>
-                  </a:lnTo>
-                  <a:lnTo>
-                    <a:pt x="6672308" y="221361"/>
-                  </a:lnTo>
-                  <a:lnTo>
-                    <a:pt x="6672308" y="54184"/>
-                  </a:lnTo>
-                  <a:lnTo>
-                    <a:pt x="7005923" y="54184"/>
-                  </a:lnTo>
-                  <a:lnTo>
-                    <a:pt x="7005923" y="0"/>
+                    <a:pt x="163724" y="2388745"/>
+                  </a:lnTo>
+                  <a:lnTo>
+                    <a:pt x="163724" y="2327089"/>
+                  </a:lnTo>
+                  <a:lnTo>
+                    <a:pt x="245587" y="2327089"/>
+                  </a:lnTo>
+                  <a:lnTo>
+                    <a:pt x="245587" y="2208613"/>
+                  </a:lnTo>
+                  <a:lnTo>
+                    <a:pt x="409311" y="2208613"/>
+                  </a:lnTo>
+                  <a:lnTo>
+                    <a:pt x="409311" y="2147031"/>
+                  </a:lnTo>
+                  <a:lnTo>
+                    <a:pt x="573036" y="2147031"/>
+                  </a:lnTo>
+                  <a:lnTo>
+                    <a:pt x="573036" y="1915680"/>
+                  </a:lnTo>
+                  <a:lnTo>
+                    <a:pt x="654898" y="1915680"/>
+                  </a:lnTo>
+                  <a:lnTo>
+                    <a:pt x="654898" y="1847871"/>
+                  </a:lnTo>
+                  <a:lnTo>
+                    <a:pt x="736761" y="1847871"/>
+                  </a:lnTo>
+                  <a:lnTo>
+                    <a:pt x="736761" y="1713232"/>
+                  </a:lnTo>
+                  <a:lnTo>
+                    <a:pt x="1064210" y="1713232"/>
+                  </a:lnTo>
+                  <a:lnTo>
+                    <a:pt x="1064210" y="1644139"/>
+                  </a:lnTo>
+                  <a:lnTo>
+                    <a:pt x="1146072" y="1644139"/>
+                  </a:lnTo>
+                  <a:lnTo>
+                    <a:pt x="1146072" y="1577446"/>
+                  </a:lnTo>
+                  <a:lnTo>
+                    <a:pt x="1391659" y="1577446"/>
+                  </a:lnTo>
+                  <a:lnTo>
+                    <a:pt x="1391659" y="1449957"/>
+                  </a:lnTo>
+                  <a:lnTo>
+                    <a:pt x="1473522" y="1449957"/>
+                  </a:lnTo>
+                  <a:lnTo>
+                    <a:pt x="1473522" y="1385649"/>
+                  </a:lnTo>
+                  <a:lnTo>
+                    <a:pt x="1964696" y="1385649"/>
+                  </a:lnTo>
+                  <a:lnTo>
+                    <a:pt x="1964696" y="1318842"/>
+                  </a:lnTo>
+                  <a:lnTo>
+                    <a:pt x="2128421" y="1318842"/>
+                  </a:lnTo>
+                  <a:lnTo>
+                    <a:pt x="2128421" y="1252903"/>
+                  </a:lnTo>
+                  <a:lnTo>
+                    <a:pt x="2537732" y="1252903"/>
+                  </a:lnTo>
+                  <a:lnTo>
+                    <a:pt x="2537732" y="1188914"/>
+                  </a:lnTo>
+                  <a:lnTo>
+                    <a:pt x="3028906" y="1188914"/>
+                  </a:lnTo>
+                  <a:lnTo>
+                    <a:pt x="3028906" y="1065465"/>
+                  </a:lnTo>
+                  <a:lnTo>
+                    <a:pt x="3110769" y="1065465"/>
+                  </a:lnTo>
+                  <a:lnTo>
+                    <a:pt x="3110769" y="833545"/>
+                  </a:lnTo>
+                  <a:lnTo>
+                    <a:pt x="3274493" y="833545"/>
+                  </a:lnTo>
+                  <a:lnTo>
+                    <a:pt x="3274493" y="775198"/>
+                  </a:lnTo>
+                  <a:lnTo>
+                    <a:pt x="3356356" y="775198"/>
+                  </a:lnTo>
+                  <a:lnTo>
+                    <a:pt x="3356356" y="718114"/>
+                  </a:lnTo>
+                  <a:lnTo>
+                    <a:pt x="4174979" y="718114"/>
+                  </a:lnTo>
+                  <a:lnTo>
+                    <a:pt x="4174979" y="662148"/>
+                  </a:lnTo>
+                  <a:lnTo>
+                    <a:pt x="4502429" y="662148"/>
+                  </a:lnTo>
+                  <a:lnTo>
+                    <a:pt x="4502429" y="607557"/>
+                  </a:lnTo>
+                  <a:lnTo>
+                    <a:pt x="4584291" y="607557"/>
+                  </a:lnTo>
+                  <a:lnTo>
+                    <a:pt x="4584291" y="554210"/>
+                  </a:lnTo>
+                  <a:lnTo>
+                    <a:pt x="4829878" y="554210"/>
+                  </a:lnTo>
+                  <a:lnTo>
+                    <a:pt x="4829878" y="353310"/>
+                  </a:lnTo>
+                  <a:lnTo>
+                    <a:pt x="4911740" y="353310"/>
+                  </a:lnTo>
+                  <a:lnTo>
+                    <a:pt x="4911740" y="301238"/>
+                  </a:lnTo>
+                  <a:lnTo>
+                    <a:pt x="5566639" y="301238"/>
+                  </a:lnTo>
+                  <a:lnTo>
+                    <a:pt x="5566639" y="250319"/>
+                  </a:lnTo>
+                  <a:lnTo>
+                    <a:pt x="6221538" y="250319"/>
+                  </a:lnTo>
+                  <a:lnTo>
+                    <a:pt x="6221538" y="199545"/>
+                  </a:lnTo>
+                  <a:lnTo>
+                    <a:pt x="6548987" y="199545"/>
+                  </a:lnTo>
+                  <a:lnTo>
+                    <a:pt x="6548987" y="48844"/>
+                  </a:lnTo>
+                  <a:lnTo>
+                    <a:pt x="6876437" y="48844"/>
+                  </a:lnTo>
+                  <a:lnTo>
+                    <a:pt x="6876437" y="0"/>
                   </a:lnTo>
                 </a:path>
               </a:pathLst>
@@ -3431,8 +3431,8 @@
           </p:nvSpPr>
           <p:spPr>
             <a:xfrm>
-              <a:off x="692708" y="5540371"/>
-              <a:ext cx="155356" cy="80101"/>
+              <a:off x="756929" y="5433678"/>
+              <a:ext cx="197510" cy="101955"/>
             </a:xfrm>
             <a:prstGeom prst="rect">
               <a:avLst/>
@@ -3445,7 +3445,7 @@
             <a:p>
               <a:pPr algn="l" marL="0" marR="0" indent="0">
                 <a:lnSpc>
-                  <a:spcPts val="880"/>
+                  <a:spcPts val="1120"/>
                 </a:lnSpc>
                 <a:spcBef>
                   <a:spcPts val="0"/>
@@ -3455,7 +3455,7 @@
                 </a:spcAft>
               </a:pPr>
               <a:r>
-                <a:rPr sz="880">
+                <a:rPr sz="1120">
                   <a:solidFill>
                     <a:srgbClr val="4D4D4D">
                       <a:alpha val="100000"/>
@@ -3477,8 +3477,8 @@
           </p:nvSpPr>
           <p:spPr>
             <a:xfrm>
-              <a:off x="692708" y="4879018"/>
-              <a:ext cx="155356" cy="80101"/>
+              <a:off x="756929" y="4837501"/>
+              <a:ext cx="197510" cy="101955"/>
             </a:xfrm>
             <a:prstGeom prst="rect">
               <a:avLst/>
@@ -3491,7 +3491,7 @@
             <a:p>
               <a:pPr algn="l" marL="0" marR="0" indent="0">
                 <a:lnSpc>
-                  <a:spcPts val="880"/>
+                  <a:spcPts val="1120"/>
                 </a:lnSpc>
                 <a:spcBef>
                   <a:spcPts val="0"/>
@@ -3501,7 +3501,7 @@
                 </a:spcAft>
               </a:pPr>
               <a:r>
-                <a:rPr sz="880">
+                <a:rPr sz="1120">
                   <a:solidFill>
                     <a:srgbClr val="4D4D4D">
                       <a:alpha val="100000"/>
@@ -3523,8 +3523,8 @@
           </p:nvSpPr>
           <p:spPr>
             <a:xfrm>
-              <a:off x="692708" y="4217664"/>
-              <a:ext cx="155356" cy="80101"/>
+              <a:off x="756929" y="4241324"/>
+              <a:ext cx="197510" cy="101955"/>
             </a:xfrm>
             <a:prstGeom prst="rect">
               <a:avLst/>
@@ -3537,7 +3537,7 @@
             <a:p>
               <a:pPr algn="l" marL="0" marR="0" indent="0">
                 <a:lnSpc>
-                  <a:spcPts val="880"/>
+                  <a:spcPts val="1120"/>
                 </a:lnSpc>
                 <a:spcBef>
                   <a:spcPts val="0"/>
@@ -3547,7 +3547,7 @@
                 </a:spcAft>
               </a:pPr>
               <a:r>
-                <a:rPr sz="880">
+                <a:rPr sz="1120">
                   <a:solidFill>
                     <a:srgbClr val="4D4D4D">
                       <a:alpha val="100000"/>
@@ -3569,8 +3569,8 @@
           </p:nvSpPr>
           <p:spPr>
             <a:xfrm>
-              <a:off x="692708" y="3556310"/>
-              <a:ext cx="155356" cy="80101"/>
+              <a:off x="756929" y="3645148"/>
+              <a:ext cx="197510" cy="101955"/>
             </a:xfrm>
             <a:prstGeom prst="rect">
               <a:avLst/>
@@ -3583,7 +3583,7 @@
             <a:p>
               <a:pPr algn="l" marL="0" marR="0" indent="0">
                 <a:lnSpc>
-                  <a:spcPts val="880"/>
+                  <a:spcPts val="1120"/>
                 </a:lnSpc>
                 <a:spcBef>
                   <a:spcPts val="0"/>
@@ -3593,7 +3593,7 @@
                 </a:spcAft>
               </a:pPr>
               <a:r>
-                <a:rPr sz="880">
+                <a:rPr sz="1120">
                   <a:solidFill>
                     <a:srgbClr val="4D4D4D">
                       <a:alpha val="100000"/>
@@ -3615,8 +3615,8 @@
           </p:nvSpPr>
           <p:spPr>
             <a:xfrm>
-              <a:off x="692708" y="2894957"/>
-              <a:ext cx="155356" cy="80101"/>
+              <a:off x="756929" y="3048971"/>
+              <a:ext cx="197510" cy="101955"/>
             </a:xfrm>
             <a:prstGeom prst="rect">
               <a:avLst/>
@@ -3629,7 +3629,7 @@
             <a:p>
               <a:pPr algn="l" marL="0" marR="0" indent="0">
                 <a:lnSpc>
-                  <a:spcPts val="880"/>
+                  <a:spcPts val="1120"/>
                 </a:lnSpc>
                 <a:spcBef>
                   <a:spcPts val="0"/>
@@ -3639,7 +3639,7 @@
                 </a:spcAft>
               </a:pPr>
               <a:r>
-                <a:rPr sz="880">
+                <a:rPr sz="1120">
                   <a:solidFill>
                     <a:srgbClr val="4D4D4D">
                       <a:alpha val="100000"/>
@@ -3661,8 +3661,8 @@
           </p:nvSpPr>
           <p:spPr>
             <a:xfrm>
-              <a:off x="896286" y="5785772"/>
-              <a:ext cx="62179" cy="80101"/>
+              <a:off x="1011021" y="5693022"/>
+              <a:ext cx="79004" cy="101955"/>
             </a:xfrm>
             <a:prstGeom prst="rect">
               <a:avLst/>
@@ -3675,7 +3675,7 @@
             <a:p>
               <a:pPr algn="l" marL="0" marR="0" indent="0">
                 <a:lnSpc>
-                  <a:spcPts val="880"/>
+                  <a:spcPts val="1120"/>
                 </a:lnSpc>
                 <a:spcBef>
                   <a:spcPts val="0"/>
@@ -3685,7 +3685,7 @@
                 </a:spcAft>
               </a:pPr>
               <a:r>
-                <a:rPr sz="880">
+                <a:rPr sz="1120">
                   <a:solidFill>
                     <a:srgbClr val="4D4D4D">
                       <a:alpha val="100000"/>
@@ -3707,8 +3707,8 @@
           </p:nvSpPr>
           <p:spPr>
             <a:xfrm>
-              <a:off x="2950293" y="5785772"/>
-              <a:ext cx="124358" cy="80101"/>
+              <a:off x="3018078" y="5693022"/>
+              <a:ext cx="158008" cy="101955"/>
             </a:xfrm>
             <a:prstGeom prst="rect">
               <a:avLst/>
@@ -3721,7 +3721,7 @@
             <a:p>
               <a:pPr algn="l" marL="0" marR="0" indent="0">
                 <a:lnSpc>
-                  <a:spcPts val="880"/>
+                  <a:spcPts val="1120"/>
                 </a:lnSpc>
                 <a:spcBef>
                   <a:spcPts val="0"/>
@@ -3731,7 +3731,7 @@
                 </a:spcAft>
               </a:pPr>
               <a:r>
-                <a:rPr sz="880">
+                <a:rPr sz="1120">
                   <a:solidFill>
                     <a:srgbClr val="4D4D4D">
                       <a:alpha val="100000"/>
@@ -3753,8 +3753,8 @@
           </p:nvSpPr>
           <p:spPr>
             <a:xfrm>
-              <a:off x="5035389" y="5785772"/>
-              <a:ext cx="124358" cy="80101"/>
+              <a:off x="5064636" y="5693022"/>
+              <a:ext cx="158008" cy="101955"/>
             </a:xfrm>
             <a:prstGeom prst="rect">
               <a:avLst/>
@@ -3767,7 +3767,7 @@
             <a:p>
               <a:pPr algn="l" marL="0" marR="0" indent="0">
                 <a:lnSpc>
-                  <a:spcPts val="880"/>
+                  <a:spcPts val="1120"/>
                 </a:lnSpc>
                 <a:spcBef>
                   <a:spcPts val="0"/>
@@ -3777,7 +3777,7 @@
                 </a:spcAft>
               </a:pPr>
               <a:r>
-                <a:rPr sz="880">
+                <a:rPr sz="1120">
                   <a:solidFill>
                     <a:srgbClr val="4D4D4D">
                       <a:alpha val="100000"/>
@@ -3799,8 +3799,8 @@
           </p:nvSpPr>
           <p:spPr>
             <a:xfrm>
-              <a:off x="7120485" y="5785772"/>
-              <a:ext cx="124358" cy="80101"/>
+              <a:off x="7111195" y="5693022"/>
+              <a:ext cx="158008" cy="101955"/>
             </a:xfrm>
             <a:prstGeom prst="rect">
               <a:avLst/>
@@ -3813,7 +3813,7 @@
             <a:p>
               <a:pPr algn="l" marL="0" marR="0" indent="0">
                 <a:lnSpc>
-                  <a:spcPts val="880"/>
+                  <a:spcPts val="1120"/>
                 </a:lnSpc>
                 <a:spcBef>
                   <a:spcPts val="0"/>
@@ -3823,7 +3823,7 @@
                 </a:spcAft>
               </a:pPr>
               <a:r>
-                <a:rPr sz="880">
+                <a:rPr sz="1120">
                   <a:solidFill>
                     <a:srgbClr val="4D4D4D">
                       <a:alpha val="100000"/>
@@ -3845,8 +3845,8 @@
           </p:nvSpPr>
           <p:spPr>
             <a:xfrm>
-              <a:off x="4166072" y="5925448"/>
-              <a:ext cx="1195760" cy="100218"/>
+              <a:off x="4055456" y="5870717"/>
+              <a:ext cx="1521470" cy="127558"/>
             </a:xfrm>
             <a:prstGeom prst="rect">
               <a:avLst/>
@@ -3859,7 +3859,7 @@
             <a:p>
               <a:pPr algn="l" marL="0" marR="0" indent="0">
                 <a:lnSpc>
-                  <a:spcPts val="1100"/>
+                  <a:spcPts val="1400"/>
                 </a:lnSpc>
                 <a:spcBef>
                   <a:spcPts val="0"/>
@@ -3869,7 +3869,7 @@
                 </a:spcAft>
               </a:pPr>
               <a:r>
-                <a:rPr sz="1100">
+                <a:rPr sz="1400">
                   <a:solidFill>
                     <a:srgbClr val="000000">
                       <a:alpha val="100000"/>
@@ -3891,8 +3891,8 @@
           </p:nvSpPr>
           <p:spPr>
             <a:xfrm rot="-5400000">
-              <a:off x="-87047" y="4103109"/>
-              <a:ext cx="1327891" cy="100218"/>
+              <a:off x="-235221" y="4134324"/>
+              <a:ext cx="1689536" cy="127558"/>
             </a:xfrm>
             <a:prstGeom prst="rect">
               <a:avLst/>
@@ -3905,7 +3905,7 @@
             <a:p>
               <a:pPr algn="l" marL="0" marR="0" indent="0">
                 <a:lnSpc>
-                  <a:spcPts val="1100"/>
+                  <a:spcPts val="1400"/>
                 </a:lnSpc>
                 <a:spcBef>
                   <a:spcPts val="0"/>
@@ -3915,7 +3915,7 @@
                 </a:spcAft>
               </a:pPr>
               <a:r>
-                <a:rPr sz="1100">
+                <a:rPr sz="1400">
                   <a:solidFill>
                     <a:srgbClr val="000000">
                       <a:alpha val="100000"/>
@@ -3937,7 +3937,7 @@
           </p:nvSpPr>
           <p:spPr>
             <a:xfrm>
-              <a:off x="3547476" y="2264798"/>
+              <a:off x="3323124" y="2407465"/>
               <a:ext cx="175564" cy="0"/>
             </a:xfrm>
             <a:custGeom>
@@ -3977,7 +3977,7 @@
           </p:nvSpPr>
           <p:spPr>
             <a:xfrm>
-              <a:off x="4788049" y="2264798"/>
+              <a:off x="4840953" y="2407465"/>
               <a:ext cx="175564" cy="0"/>
             </a:xfrm>
             <a:custGeom>
@@ -4017,8 +4017,8 @@
           </p:nvSpPr>
           <p:spPr>
             <a:xfrm>
-              <a:off x="3814575" y="2224748"/>
-              <a:ext cx="881938" cy="80101"/>
+              <a:off x="3609202" y="2356487"/>
+              <a:ext cx="1121237" cy="101955"/>
             </a:xfrm>
             <a:prstGeom prst="rect">
               <a:avLst/>
@@ -4031,7 +4031,7 @@
             <a:p>
               <a:pPr algn="l" marL="0" marR="0" indent="0">
                 <a:lnSpc>
-                  <a:spcPts val="880"/>
+                  <a:spcPts val="1120"/>
                 </a:lnSpc>
                 <a:spcBef>
                   <a:spcPts val="0"/>
@@ -4041,7 +4041,7 @@
                 </a:spcAft>
               </a:pPr>
               <a:r>
-                <a:rPr sz="880">
+                <a:rPr sz="1120">
                   <a:solidFill>
                     <a:srgbClr val="000000">
                       <a:alpha val="100000"/>
@@ -4063,8 +4063,8 @@
           </p:nvSpPr>
           <p:spPr>
             <a:xfrm>
-              <a:off x="5055148" y="2224748"/>
-              <a:ext cx="947226" cy="80101"/>
+              <a:off x="5127031" y="2356487"/>
+              <a:ext cx="1204173" cy="101955"/>
             </a:xfrm>
             <a:prstGeom prst="rect">
               <a:avLst/>
@@ -4077,7 +4077,7 @@
             <a:p>
               <a:pPr algn="l" marL="0" marR="0" indent="0">
                 <a:lnSpc>
-                  <a:spcPts val="880"/>
+                  <a:spcPts val="1120"/>
                 </a:lnSpc>
                 <a:spcBef>
                   <a:spcPts val="0"/>
@@ -4087,7 +4087,7 @@
                 </a:spcAft>
               </a:pPr>
               <a:r>
-                <a:rPr sz="880">
+                <a:rPr sz="1120">
                   <a:solidFill>
                     <a:srgbClr val="000000">
                       <a:alpha val="100000"/>
@@ -4109,8 +4109,8 @@
           </p:nvSpPr>
           <p:spPr>
             <a:xfrm>
-              <a:off x="910695" y="1896563"/>
-              <a:ext cx="3913906" cy="91165"/>
+              <a:off x="1034151" y="1977589"/>
+              <a:ext cx="4697455" cy="109362"/>
             </a:xfrm>
             <a:prstGeom prst="rect">
               <a:avLst/>
@@ -4123,7 +4123,7 @@
             <a:p>
               <a:pPr algn="l" marL="0" marR="0" indent="0">
                 <a:lnSpc>
-                  <a:spcPts val="1000"/>
+                  <a:spcPts val="1200"/>
                 </a:lnSpc>
                 <a:spcBef>
                   <a:spcPts val="0"/>
@@ -4133,7 +4133,7 @@
                 </a:spcAft>
               </a:pPr>
               <a:r>
-                <a:rPr sz="1000">
+                <a:rPr sz="1200">
                   <a:solidFill>
                     <a:srgbClr val="404040">
                       <a:alpha val="100000"/>
@@ -4155,8 +4155,8 @@
           </p:nvSpPr>
           <p:spPr>
             <a:xfrm>
-              <a:off x="910695" y="1669789"/>
-              <a:ext cx="1219901" cy="120152"/>
+              <a:off x="1034151" y="1688767"/>
+              <a:ext cx="1553016" cy="153070"/>
             </a:xfrm>
             <a:prstGeom prst="rect">
               <a:avLst/>
@@ -4169,7 +4169,7 @@
             <a:p>
               <a:pPr algn="l" marL="0" marR="0" indent="0">
                 <a:lnSpc>
-                  <a:spcPts val="1320"/>
+                  <a:spcPts val="1680"/>
                 </a:lnSpc>
                 <a:spcBef>
                   <a:spcPts val="0"/>
@@ -4179,7 +4179,7 @@
                 </a:spcAft>
               </a:pPr>
               <a:r>
-                <a:rPr sz="1320">
+                <a:rPr sz="1680">
                   <a:solidFill>
                     <a:srgbClr val="000000">
                       <a:alpha val="100000"/>
